--- a/session5/session5_full.pptx
+++ b/session5/session5_full.pptx
@@ -6,6 +6,7 @@
   </p:sldMasterIdLst>
   <p:sldIdLst>
     <p:sldId id="256" r:id="rId2"/>
+    <p:sldId id="268" r:id="rId19"/>
     <p:sldId id="257" r:id="rId3"/>
     <p:sldId id="258" r:id="rId4"/>
     <p:sldId id="259" r:id="rId5"/>
@@ -2021,6 +2022,10 @@
             <a:prstDash val="solid"/>
           </a:ln>
         </p:spPr>
+        <p:txBody>
+          <a:bodyPr/>
+          <a:p/>
+        </p:txBody>
       </p:sp>
       <p:sp>
         <p:nvSpPr>
@@ -2175,6 +2180,39 @@
               <a:t>Koji</a:t>
             </a:r>
             <a:endParaRPr lang="en-US" sz="1100" dirty="0"/>
+          </a:p>
+        </p:txBody>
+      </p:sp>
+      <p:sp>
+        <p:nvSpPr>
+          <p:cNvPr id="11" name="TextBox 10"/>
+          <p:cNvSpPr txBox="1"/>
+          <p:nvPr/>
+        </p:nvSpPr>
+        <p:spPr>
+          <a:xfrm>
+            <a:off x="457200" y="4280000"/>
+            <a:ext cx="8229600" cy="290000"/>
+          </a:xfrm>
+          <a:prstGeom prst="rect">
+            <a:avLst/>
+          </a:prstGeom>
+          <a:noFill/>
+        </p:spPr>
+        <p:txBody>
+          <a:bodyPr wrap="square" lIns="0" rIns="0" tIns="0" bIns="0">
+            <a:spAutoFit/>
+          </a:bodyPr>
+          <a:lstStyle/>
+          <a:p>
+            <a:r>
+              <a:rPr sz="1500" b="1">
+                <a:solidFill>
+                  <a:srgbClr val="FFC800"/>
+                </a:solidFill>
+              </a:rPr>
+              <a:t>★ 覚えて帰る一言: 「計画を書いてからAIに渡す」</a:t>
+            </a:r>
           </a:p>
         </p:txBody>
       </p:sp>
@@ -2187,6 +2225,886 @@
 </file>
 
 <file path=ppt/slides/slide10.xml><?xml version="1.0" encoding="utf-8"?>
+<p:sld xmlns:a="http://schemas.openxmlformats.org/drawingml/2006/main" xmlns:r="http://schemas.openxmlformats.org/officeDocument/2006/relationships" xmlns:p="http://schemas.openxmlformats.org/presentationml/2006/main">
+  <p:cSld name="Slide 9">
+    <p:bg>
+      <p:bgPr>
+        <a:solidFill>
+          <a:srgbClr val="FFFFFF"/>
+        </a:solidFill>
+      </p:bgPr>
+    </p:bg>
+    <p:spTree>
+      <p:nvGrpSpPr>
+        <p:cNvPr id="1" name=""/>
+        <p:cNvGrpSpPr/>
+        <p:nvPr/>
+      </p:nvGrpSpPr>
+      <p:grpSpPr>
+        <a:xfrm>
+          <a:off x="0" y="0"/>
+          <a:ext cx="0" cy="0"/>
+          <a:chOff x="0" y="0"/>
+          <a:chExt cx="0" cy="0"/>
+        </a:xfrm>
+      </p:grpSpPr>
+      <p:sp>
+        <p:nvSpPr>
+          <p:cNvPr id="2" name="Text 0"/>
+          <p:cNvSpPr/>
+          <p:nvPr/>
+        </p:nvSpPr>
+        <p:spPr>
+          <a:xfrm>
+            <a:off x="457200" y="320040"/>
+            <a:ext cx="8229600" cy="548640"/>
+          </a:xfrm>
+          <a:prstGeom prst="rect">
+            <a:avLst/>
+          </a:prstGeom>
+          <a:noFill/>
+          <a:ln/>
+        </p:spPr>
+        <p:txBody>
+          <a:bodyPr wrap="square" lIns="0" tIns="0" rIns="0" bIns="0" rtlCol="0" anchor="ctr"/>
+          <a:lstStyle/>
+          <a:p>
+            <a:pPr indent="0" marL="0">
+              <a:buNone/>
+            </a:pPr>
+            <a:r>
+              <a:rPr lang="en-US" sz="2600" b="1" dirty="0">
+                <a:solidFill>
+                  <a:srgbClr val="1E2761"/>
+                </a:solidFill>
+                <a:latin typeface="Arial Black" pitchFamily="34" charset="0"/>
+                <a:ea typeface="Arial Black" pitchFamily="34" charset="-122"/>
+                <a:cs typeface="Arial Black" pitchFamily="34" charset="-120"/>
+              </a:rPr>
+              <a:t>AI開発の3段階成熟度モデル</a:t>
+            </a:r>
+            <a:endParaRPr lang="en-US" sz="2600" dirty="0"/>
+          </a:p>
+        </p:txBody>
+      </p:sp>
+      <p:sp>
+        <p:nvSpPr>
+          <p:cNvPr id="3" name="Shape 1"/>
+          <p:cNvSpPr/>
+          <p:nvPr/>
+        </p:nvSpPr>
+        <p:spPr>
+          <a:xfrm>
+            <a:off x="457200" y="932688"/>
+            <a:ext cx="548640" cy="45720"/>
+          </a:xfrm>
+          <a:prstGeom prst="rect">
+            <a:avLst/>
+          </a:prstGeom>
+          <a:solidFill>
+            <a:srgbClr val="F96167"/>
+          </a:solidFill>
+          <a:ln w="12700">
+            <a:solidFill>
+              <a:srgbClr val="F96167"/>
+            </a:solidFill>
+            <a:prstDash val="solid"/>
+          </a:ln>
+        </p:spPr>
+        <p:txBody>
+          <a:bodyPr/>
+          <a:p/>
+        </p:txBody>
+      </p:sp>
+      <p:sp>
+        <p:nvSpPr>
+          <p:cNvPr id="4" name="Text 2"/>
+          <p:cNvSpPr/>
+          <p:nvPr/>
+        </p:nvSpPr>
+        <p:spPr>
+          <a:xfrm>
+            <a:off x="457200" y="1051560"/>
+            <a:ext cx="8229600" cy="274320"/>
+          </a:xfrm>
+          <a:prstGeom prst="rect">
+            <a:avLst/>
+          </a:prstGeom>
+          <a:noFill/>
+          <a:ln/>
+        </p:spPr>
+        <p:txBody>
+          <a:bodyPr wrap="square" lIns="0" tIns="0" rIns="0" bIns="0" rtlCol="0" anchor="ctr"/>
+          <a:lstStyle/>
+          <a:p>
+            <a:pPr indent="0" marL="0">
+              <a:buNone/>
+            </a:pPr>
+            <a:r>
+              <a:rPr lang="en-US" sz="1300" i="1" dirty="0">
+                <a:solidFill>
+                  <a:srgbClr val="64748B"/>
+                </a:solidFill>
+                <a:latin typeface="Meiryo" pitchFamily="34" charset="0"/>
+                <a:ea typeface="Meiryo" pitchFamily="34" charset="-122"/>
+                <a:cs typeface="Meiryo" pitchFamily="34" charset="-120"/>
+              </a:rPr>
+              <a:t>自分の現在地を知り、次のレベルに進む</a:t>
+            </a:r>
+            <a:endParaRPr lang="en-US" sz="1300" dirty="0"/>
+          </a:p>
+        </p:txBody>
+      </p:sp>
+      <p:sp>
+        <p:nvSpPr>
+          <p:cNvPr id="5" name="Shape 3"/>
+          <p:cNvSpPr/>
+          <p:nvPr/>
+        </p:nvSpPr>
+        <p:spPr>
+          <a:xfrm>
+            <a:off x="457200" y="3300984"/>
+            <a:ext cx="8229600" cy="868680"/>
+          </a:xfrm>
+          <a:prstGeom prst="rect">
+            <a:avLst/>
+          </a:prstGeom>
+          <a:solidFill>
+            <a:srgbClr val="F8F9FC"/>
+          </a:solidFill>
+          <a:ln w="9525">
+            <a:solidFill>
+              <a:srgbClr val="E5E9F2"/>
+            </a:solidFill>
+            <a:prstDash val="solid"/>
+          </a:ln>
+        </p:spPr>
+        <p:txBody>
+          <a:bodyPr/>
+          <a:p/>
+        </p:txBody>
+      </p:sp>
+      <p:sp>
+        <p:nvSpPr>
+          <p:cNvPr id="6" name="Text 4"/>
+          <p:cNvSpPr/>
+          <p:nvPr/>
+        </p:nvSpPr>
+        <p:spPr>
+          <a:xfrm>
+            <a:off x="640080" y="3300984"/>
+            <a:ext cx="1097280" cy="434340"/>
+          </a:xfrm>
+          <a:prstGeom prst="rect">
+            <a:avLst/>
+          </a:prstGeom>
+          <a:noFill/>
+          <a:ln/>
+        </p:spPr>
+        <p:txBody>
+          <a:bodyPr wrap="square" lIns="0" tIns="0" rIns="0" bIns="0" rtlCol="0" anchor="b"/>
+          <a:lstStyle/>
+          <a:p>
+            <a:pPr indent="0" marL="0">
+              <a:buNone/>
+            </a:pPr>
+            <a:r>
+              <a:rPr lang="en-US" sz="1000" dirty="0">
+                <a:solidFill>
+                  <a:srgbClr val="64748B"/>
+                </a:solidFill>
+                <a:latin typeface="Arial Black" pitchFamily="34" charset="0"/>
+                <a:ea typeface="Arial Black" pitchFamily="34" charset="-122"/>
+                <a:cs typeface="Arial Black" pitchFamily="34" charset="-120"/>
+              </a:rPr>
+              <a:t>Level 1</a:t>
+            </a:r>
+            <a:endParaRPr lang="en-US" sz="1000" dirty="0"/>
+          </a:p>
+        </p:txBody>
+      </p:sp>
+      <p:sp>
+        <p:nvSpPr>
+          <p:cNvPr id="7" name="Text 5"/>
+          <p:cNvSpPr/>
+          <p:nvPr/>
+        </p:nvSpPr>
+        <p:spPr>
+          <a:xfrm>
+            <a:off x="1737360" y="3300984"/>
+            <a:ext cx="2743200" cy="434340"/>
+          </a:xfrm>
+          <a:prstGeom prst="rect">
+            <a:avLst/>
+          </a:prstGeom>
+          <a:noFill/>
+          <a:ln/>
+        </p:spPr>
+        <p:txBody>
+          <a:bodyPr wrap="square" lIns="0" tIns="0" rIns="0" bIns="0" rtlCol="0" anchor="b"/>
+          <a:lstStyle/>
+          <a:p>
+            <a:pPr indent="0" marL="0">
+              <a:buNone/>
+            </a:pPr>
+            <a:r>
+              <a:rPr lang="en-US" sz="1400" b="1" dirty="0">
+                <a:solidFill>
+                  <a:srgbClr val="64748B"/>
+                </a:solidFill>
+                <a:latin typeface="Arial Black" pitchFamily="34" charset="0"/>
+                <a:ea typeface="Arial Black" pitchFamily="34" charset="-122"/>
+                <a:cs typeface="Arial Black" pitchFamily="34" charset="-120"/>
+              </a:rPr>
+              <a:t>バイブコーディング</a:t>
+            </a:r>
+            <a:endParaRPr lang="en-US" sz="1400" dirty="0"/>
+          </a:p>
+        </p:txBody>
+      </p:sp>
+      <p:sp>
+        <p:nvSpPr>
+          <p:cNvPr id="8" name="Text 6"/>
+          <p:cNvSpPr/>
+          <p:nvPr/>
+        </p:nvSpPr>
+        <p:spPr>
+          <a:xfrm>
+            <a:off x="640080" y="3735324"/>
+            <a:ext cx="3703320" cy="434340"/>
+          </a:xfrm>
+          <a:prstGeom prst="rect">
+            <a:avLst/>
+          </a:prstGeom>
+          <a:noFill/>
+          <a:ln/>
+        </p:spPr>
+        <p:txBody>
+          <a:bodyPr wrap="square" lIns="0" tIns="0" rIns="0" bIns="0" rtlCol="0" anchor="t"/>
+          <a:lstStyle/>
+          <a:p>
+            <a:pPr indent="0" marL="0">
+              <a:buNone/>
+            </a:pPr>
+            <a:r>
+              <a:rPr lang="en-US" sz="900" dirty="0">
+                <a:solidFill>
+                  <a:srgbClr val="2D3748"/>
+                </a:solidFill>
+                <a:latin typeface="Meiryo" pitchFamily="34" charset="0"/>
+                <a:ea typeface="Meiryo" pitchFamily="34" charset="-122"/>
+                <a:cs typeface="Meiryo" pitchFamily="34" charset="-120"/>
+              </a:rPr>
+              <a:t>自然言語で指示 → AI即座にコード生成</a:t>
+            </a:r>
+            <a:endParaRPr lang="en-US" sz="900" dirty="0"/>
+          </a:p>
+          <a:p>
+            <a:pPr indent="0" marL="0">
+              <a:buNone/>
+            </a:pPr>
+            <a:r>
+              <a:rPr lang="en-US" sz="900" dirty="0">
+                <a:solidFill>
+                  <a:srgbClr val="2D3748"/>
+                </a:solidFill>
+                <a:latin typeface="Meiryo" pitchFamily="34" charset="0"/>
+                <a:ea typeface="Meiryo" pitchFamily="34" charset="-122"/>
+                <a:cs typeface="Meiryo" pitchFamily="34" charset="-120"/>
+              </a:rPr>
+              <a:t>プロトタイプ・個人ツール向き</a:t>
+            </a:r>
+            <a:endParaRPr lang="en-US" sz="900" dirty="0"/>
+          </a:p>
+        </p:txBody>
+      </p:sp>
+      <p:sp>
+        <p:nvSpPr>
+          <p:cNvPr id="9" name="Text 7"/>
+          <p:cNvSpPr/>
+          <p:nvPr/>
+        </p:nvSpPr>
+        <p:spPr>
+          <a:xfrm>
+            <a:off x="4343400" y="3735324"/>
+            <a:ext cx="4114800" cy="434340"/>
+          </a:xfrm>
+          <a:prstGeom prst="rect">
+            <a:avLst/>
+          </a:prstGeom>
+          <a:noFill/>
+          <a:ln/>
+        </p:spPr>
+        <p:txBody>
+          <a:bodyPr wrap="square" lIns="0" tIns="0" rIns="0" bIns="0" rtlCol="0" anchor="t"/>
+          <a:lstStyle/>
+          <a:p>
+            <a:pPr indent="0" marL="0">
+              <a:buNone/>
+            </a:pPr>
+            <a:r>
+              <a:rPr lang="en-US" sz="900" dirty="0">
+                <a:solidFill>
+                  <a:srgbClr val="64748B"/>
+                </a:solidFill>
+                <a:latin typeface="Meiryo" pitchFamily="34" charset="0"/>
+                <a:ea typeface="Meiryo" pitchFamily="34" charset="-122"/>
+                <a:cs typeface="Meiryo" pitchFamily="34" charset="-120"/>
+              </a:rPr>
+              <a:t>仕様曖昧で手戻り / スケールしない / 記録が残らない</a:t>
+            </a:r>
+            <a:endParaRPr lang="en-US" sz="900" dirty="0"/>
+          </a:p>
+        </p:txBody>
+      </p:sp>
+      <p:sp>
+        <p:nvSpPr>
+          <p:cNvPr id="10" name="Shape 8"/>
+          <p:cNvSpPr/>
+          <p:nvPr/>
+        </p:nvSpPr>
+        <p:spPr>
+          <a:xfrm>
+            <a:off x="457200" y="2359152"/>
+            <a:ext cx="6400800" cy="868680"/>
+          </a:xfrm>
+          <a:prstGeom prst="rect">
+            <a:avLst/>
+          </a:prstGeom>
+          <a:solidFill>
+            <a:srgbClr val="1E2761"/>
+          </a:solidFill>
+          <a:ln w="12700">
+            <a:solidFill>
+              <a:srgbClr val="1E2761"/>
+            </a:solidFill>
+            <a:prstDash val="solid"/>
+          </a:ln>
+        </p:spPr>
+        <p:txBody>
+          <a:bodyPr/>
+          <a:p/>
+        </p:txBody>
+      </p:sp>
+      <p:sp>
+        <p:nvSpPr>
+          <p:cNvPr id="11" name="Text 9"/>
+          <p:cNvSpPr/>
+          <p:nvPr/>
+        </p:nvSpPr>
+        <p:spPr>
+          <a:xfrm>
+            <a:off x="640080" y="2359152"/>
+            <a:ext cx="1097280" cy="434340"/>
+          </a:xfrm>
+          <a:prstGeom prst="rect">
+            <a:avLst/>
+          </a:prstGeom>
+          <a:noFill/>
+          <a:ln/>
+        </p:spPr>
+        <p:txBody>
+          <a:bodyPr wrap="square" lIns="0" tIns="0" rIns="0" bIns="0" rtlCol="0" anchor="b"/>
+          <a:lstStyle/>
+          <a:p>
+            <a:pPr indent="0" marL="0">
+              <a:buNone/>
+            </a:pPr>
+            <a:r>
+              <a:rPr lang="en-US" sz="1000" dirty="0">
+                <a:solidFill>
+                  <a:srgbClr val="FFFFFF"/>
+                </a:solidFill>
+                <a:latin typeface="Arial Black" pitchFamily="34" charset="0"/>
+                <a:ea typeface="Arial Black" pitchFamily="34" charset="-122"/>
+                <a:cs typeface="Arial Black" pitchFamily="34" charset="-120"/>
+              </a:rPr>
+              <a:t>Level 2</a:t>
+            </a:r>
+            <a:endParaRPr lang="en-US" sz="1000" dirty="0"/>
+          </a:p>
+        </p:txBody>
+      </p:sp>
+      <p:sp>
+        <p:nvSpPr>
+          <p:cNvPr id="12" name="Text 10"/>
+          <p:cNvSpPr/>
+          <p:nvPr/>
+        </p:nvSpPr>
+        <p:spPr>
+          <a:xfrm>
+            <a:off x="1737360" y="2359152"/>
+            <a:ext cx="2743200" cy="434340"/>
+          </a:xfrm>
+          <a:prstGeom prst="rect">
+            <a:avLst/>
+          </a:prstGeom>
+          <a:noFill/>
+          <a:ln/>
+        </p:spPr>
+        <p:txBody>
+          <a:bodyPr wrap="square" lIns="0" tIns="0" rIns="0" bIns="0" rtlCol="0" anchor="b"/>
+          <a:lstStyle/>
+          <a:p>
+            <a:pPr indent="0" marL="0">
+              <a:buNone/>
+            </a:pPr>
+            <a:r>
+              <a:rPr lang="en-US" sz="1400" b="1" dirty="0">
+                <a:solidFill>
+                  <a:srgbClr val="FFFFFF"/>
+                </a:solidFill>
+                <a:latin typeface="Arial Black" pitchFamily="34" charset="0"/>
+                <a:ea typeface="Arial Black" pitchFamily="34" charset="-122"/>
+                <a:cs typeface="Arial Black" pitchFamily="34" charset="-120"/>
+              </a:rPr>
+              <a:t>スペック駆動開発（SDD）</a:t>
+            </a:r>
+            <a:endParaRPr lang="en-US" sz="1400" dirty="0"/>
+          </a:p>
+        </p:txBody>
+      </p:sp>
+      <p:sp>
+        <p:nvSpPr>
+          <p:cNvPr id="13" name="Text 11"/>
+          <p:cNvSpPr/>
+          <p:nvPr/>
+        </p:nvSpPr>
+        <p:spPr>
+          <a:xfrm>
+            <a:off x="640080" y="2793492"/>
+            <a:ext cx="2880360" cy="434340"/>
+          </a:xfrm>
+          <a:prstGeom prst="rect">
+            <a:avLst/>
+          </a:prstGeom>
+          <a:noFill/>
+          <a:ln/>
+        </p:spPr>
+        <p:txBody>
+          <a:bodyPr wrap="square" lIns="0" tIns="0" rIns="0" bIns="0" rtlCol="0" anchor="t"/>
+          <a:lstStyle/>
+          <a:p>
+            <a:pPr indent="0" marL="0">
+              <a:buNone/>
+            </a:pPr>
+            <a:r>
+              <a:rPr lang="en-US" sz="900" dirty="0">
+                <a:solidFill>
+                  <a:srgbClr val="CADCFC"/>
+                </a:solidFill>
+                <a:latin typeface="Meiryo" pitchFamily="34" charset="0"/>
+                <a:ea typeface="Meiryo" pitchFamily="34" charset="-122"/>
+                <a:cs typeface="Meiryo" pitchFamily="34" charset="-120"/>
+              </a:rPr>
+              <a:t>仕様書をSingle Source of Truth</a:t>
+            </a:r>
+            <a:endParaRPr lang="en-US" sz="900" dirty="0"/>
+          </a:p>
+          <a:p>
+            <a:pPr indent="0" marL="0">
+              <a:buNone/>
+            </a:pPr>
+            <a:r>
+              <a:rPr lang="en-US" sz="900" dirty="0">
+                <a:solidFill>
+                  <a:srgbClr val="CADCFC"/>
+                </a:solidFill>
+                <a:latin typeface="Meiryo" pitchFamily="34" charset="0"/>
+                <a:ea typeface="Meiryo" pitchFamily="34" charset="-122"/>
+                <a:cs typeface="Meiryo" pitchFamily="34" charset="-120"/>
+              </a:rPr>
+              <a:t>PRD→設計書→仕様書→実装</a:t>
+            </a:r>
+            <a:endParaRPr lang="en-US" sz="900" dirty="0"/>
+          </a:p>
+        </p:txBody>
+      </p:sp>
+      <p:sp>
+        <p:nvSpPr>
+          <p:cNvPr id="14" name="Text 12"/>
+          <p:cNvSpPr/>
+          <p:nvPr/>
+        </p:nvSpPr>
+        <p:spPr>
+          <a:xfrm>
+            <a:off x="3520440" y="2793492"/>
+            <a:ext cx="3200400" cy="434340"/>
+          </a:xfrm>
+          <a:prstGeom prst="rect">
+            <a:avLst/>
+          </a:prstGeom>
+          <a:noFill/>
+          <a:ln/>
+        </p:spPr>
+        <p:txBody>
+          <a:bodyPr wrap="square" lIns="0" tIns="0" rIns="0" bIns="0" rtlCol="0" anchor="t"/>
+          <a:lstStyle/>
+          <a:p>
+            <a:pPr indent="0" marL="0">
+              <a:buNone/>
+            </a:pPr>
+            <a:r>
+              <a:rPr lang="en-US" sz="900" dirty="0">
+                <a:solidFill>
+                  <a:srgbClr val="CADCFC"/>
+                </a:solidFill>
+                <a:latin typeface="Meiryo" pitchFamily="34" charset="0"/>
+                <a:ea typeface="Meiryo" pitchFamily="34" charset="-122"/>
+                <a:cs typeface="Meiryo" pitchFamily="34" charset="-120"/>
+              </a:rPr>
+              <a:t>チーム開発・プロダクション品質に対応可能</a:t>
+            </a:r>
+            <a:endParaRPr lang="en-US" sz="900" dirty="0"/>
+          </a:p>
+        </p:txBody>
+      </p:sp>
+      <p:sp>
+        <p:nvSpPr>
+          <p:cNvPr id="15" name="Shape 13"/>
+          <p:cNvSpPr/>
+          <p:nvPr/>
+        </p:nvSpPr>
+        <p:spPr>
+          <a:xfrm>
+            <a:off x="457200" y="1417320"/>
+            <a:ext cx="4572000" cy="868680"/>
+          </a:xfrm>
+          <a:prstGeom prst="rect">
+            <a:avLst/>
+          </a:prstGeom>
+          <a:solidFill>
+            <a:srgbClr val="F96167"/>
+          </a:solidFill>
+          <a:ln w="12700">
+            <a:solidFill>
+              <a:srgbClr val="F96167"/>
+            </a:solidFill>
+            <a:prstDash val="solid"/>
+          </a:ln>
+        </p:spPr>
+        <p:txBody>
+          <a:bodyPr/>
+          <a:p/>
+        </p:txBody>
+      </p:sp>
+      <p:sp>
+        <p:nvSpPr>
+          <p:cNvPr id="16" name="Text 14"/>
+          <p:cNvSpPr/>
+          <p:nvPr/>
+        </p:nvSpPr>
+        <p:spPr>
+          <a:xfrm>
+            <a:off x="640080" y="1417320"/>
+            <a:ext cx="1097280" cy="434340"/>
+          </a:xfrm>
+          <a:prstGeom prst="rect">
+            <a:avLst/>
+          </a:prstGeom>
+          <a:noFill/>
+          <a:ln/>
+        </p:spPr>
+        <p:txBody>
+          <a:bodyPr wrap="square" lIns="0" tIns="0" rIns="0" bIns="0" rtlCol="0" anchor="b"/>
+          <a:lstStyle/>
+          <a:p>
+            <a:pPr indent="0" marL="0">
+              <a:buNone/>
+            </a:pPr>
+            <a:r>
+              <a:rPr lang="en-US" sz="1000" dirty="0">
+                <a:solidFill>
+                  <a:srgbClr val="FFFFFF"/>
+                </a:solidFill>
+                <a:latin typeface="Arial Black" pitchFamily="34" charset="0"/>
+                <a:ea typeface="Arial Black" pitchFamily="34" charset="-122"/>
+                <a:cs typeface="Arial Black" pitchFamily="34" charset="-120"/>
+              </a:rPr>
+              <a:t>Level 3</a:t>
+            </a:r>
+            <a:endParaRPr lang="en-US" sz="1000" dirty="0"/>
+          </a:p>
+        </p:txBody>
+      </p:sp>
+      <p:sp>
+        <p:nvSpPr>
+          <p:cNvPr id="17" name="Text 15"/>
+          <p:cNvSpPr/>
+          <p:nvPr/>
+        </p:nvSpPr>
+        <p:spPr>
+          <a:xfrm>
+            <a:off x="1737360" y="1417320"/>
+            <a:ext cx="2743200" cy="434340"/>
+          </a:xfrm>
+          <a:prstGeom prst="rect">
+            <a:avLst/>
+          </a:prstGeom>
+          <a:noFill/>
+          <a:ln/>
+        </p:spPr>
+        <p:txBody>
+          <a:bodyPr wrap="square" lIns="0" tIns="0" rIns="0" bIns="0" rtlCol="0" anchor="b"/>
+          <a:lstStyle/>
+          <a:p>
+            <a:pPr indent="0" marL="0">
+              <a:buNone/>
+            </a:pPr>
+            <a:r>
+              <a:rPr lang="en-US" sz="1400" b="1" dirty="0">
+                <a:solidFill>
+                  <a:srgbClr val="FFFFFF"/>
+                </a:solidFill>
+                <a:latin typeface="Arial Black" pitchFamily="34" charset="0"/>
+                <a:ea typeface="Arial Black" pitchFamily="34" charset="-122"/>
+                <a:cs typeface="Arial Black" pitchFamily="34" charset="-120"/>
+              </a:rPr>
+              <a:t>AIDLC</a:t>
+            </a:r>
+            <a:endParaRPr lang="en-US" sz="1400" dirty="0"/>
+          </a:p>
+        </p:txBody>
+      </p:sp>
+      <p:sp>
+        <p:nvSpPr>
+          <p:cNvPr id="18" name="Text 16"/>
+          <p:cNvSpPr/>
+          <p:nvPr/>
+        </p:nvSpPr>
+        <p:spPr>
+          <a:xfrm>
+            <a:off x="640080" y="1851660"/>
+            <a:ext cx="2057400" cy="434340"/>
+          </a:xfrm>
+          <a:prstGeom prst="rect">
+            <a:avLst/>
+          </a:prstGeom>
+          <a:noFill/>
+          <a:ln/>
+        </p:spPr>
+        <p:txBody>
+          <a:bodyPr wrap="square" lIns="0" tIns="0" rIns="0" bIns="0" rtlCol="0" anchor="t"/>
+          <a:lstStyle/>
+          <a:p>
+            <a:pPr indent="0" marL="0">
+              <a:buNone/>
+            </a:pPr>
+            <a:r>
+              <a:rPr lang="en-US" sz="900" dirty="0">
+                <a:solidFill>
+                  <a:srgbClr val="CADCFC"/>
+                </a:solidFill>
+                <a:latin typeface="Meiryo" pitchFamily="34" charset="0"/>
+                <a:ea typeface="Meiryo" pitchFamily="34" charset="-122"/>
+                <a:cs typeface="Meiryo" pitchFamily="34" charset="-120"/>
+              </a:rPr>
+              <a:t>Inception→Construction→Operation</a:t>
+            </a:r>
+            <a:endParaRPr lang="en-US" sz="900" dirty="0"/>
+          </a:p>
+          <a:p>
+            <a:pPr indent="0" marL="0">
+              <a:buNone/>
+            </a:pPr>
+            <a:r>
+              <a:rPr lang="en-US" sz="900" dirty="0">
+                <a:solidFill>
+                  <a:srgbClr val="CADCFC"/>
+                </a:solidFill>
+                <a:latin typeface="Meiryo" pitchFamily="34" charset="0"/>
+                <a:ea typeface="Meiryo" pitchFamily="34" charset="-122"/>
+                <a:cs typeface="Meiryo" pitchFamily="34" charset="-120"/>
+              </a:rPr>
+              <a:t>各フェーズに人間のレビューゲート</a:t>
+            </a:r>
+            <a:endParaRPr lang="en-US" sz="900" dirty="0"/>
+          </a:p>
+        </p:txBody>
+      </p:sp>
+      <p:sp>
+        <p:nvSpPr>
+          <p:cNvPr id="19" name="Text 17"/>
+          <p:cNvSpPr/>
+          <p:nvPr/>
+        </p:nvSpPr>
+        <p:spPr>
+          <a:xfrm>
+            <a:off x="2697480" y="1851660"/>
+            <a:ext cx="2286000" cy="434340"/>
+          </a:xfrm>
+          <a:prstGeom prst="rect">
+            <a:avLst/>
+          </a:prstGeom>
+          <a:noFill/>
+          <a:ln/>
+        </p:spPr>
+        <p:txBody>
+          <a:bodyPr wrap="square" lIns="0" tIns="0" rIns="0" bIns="0" rtlCol="0" anchor="t"/>
+          <a:lstStyle/>
+          <a:p>
+            <a:pPr indent="0" marL="0">
+              <a:buNone/>
+            </a:pPr>
+            <a:r>
+              <a:rPr lang="en-US" sz="900" dirty="0">
+                <a:solidFill>
+                  <a:srgbClr val="CADCFC"/>
+                </a:solidFill>
+                <a:latin typeface="Meiryo" pitchFamily="34" charset="0"/>
+                <a:ea typeface="Meiryo" pitchFamily="34" charset="-122"/>
+                <a:cs typeface="Meiryo" pitchFamily="34" charset="-120"/>
+              </a:rPr>
+              <a:t>大規模チーム・組織レベルのAI開発ガバナンス</a:t>
+            </a:r>
+            <a:endParaRPr lang="en-US" sz="900" dirty="0"/>
+          </a:p>
+        </p:txBody>
+      </p:sp>
+      <p:sp>
+        <p:nvSpPr>
+          <p:cNvPr id="20" name="Shape 18"/>
+          <p:cNvSpPr/>
+          <p:nvPr/>
+        </p:nvSpPr>
+        <p:spPr>
+          <a:xfrm>
+            <a:off x="457200" y="4343400"/>
+            <a:ext cx="8229600" cy="365760"/>
+          </a:xfrm>
+          <a:prstGeom prst="rect">
+            <a:avLst/>
+          </a:prstGeom>
+          <a:solidFill>
+            <a:srgbClr val="151B47"/>
+          </a:solidFill>
+          <a:ln w="12700">
+            <a:solidFill>
+              <a:srgbClr val="151B47"/>
+            </a:solidFill>
+            <a:prstDash val="solid"/>
+          </a:ln>
+        </p:spPr>
+        <p:txBody>
+          <a:bodyPr/>
+          <a:p/>
+        </p:txBody>
+      </p:sp>
+      <p:sp>
+        <p:nvSpPr>
+          <p:cNvPr id="21" name="Text 19"/>
+          <p:cNvSpPr/>
+          <p:nvPr/>
+        </p:nvSpPr>
+        <p:spPr>
+          <a:xfrm>
+            <a:off x="594360" y="4343400"/>
+            <a:ext cx="7955280" cy="365760"/>
+          </a:xfrm>
+          <a:prstGeom prst="rect">
+            <a:avLst/>
+          </a:prstGeom>
+          <a:noFill/>
+          <a:ln/>
+        </p:spPr>
+        <p:txBody>
+          <a:bodyPr wrap="square" lIns="0" tIns="0" rIns="0" bIns="0" rtlCol="0" anchor="ctr"/>
+          <a:lstStyle/>
+          <a:p>
+            <a:pPr indent="0" marL="0">
+              <a:buNone/>
+            </a:pPr>
+            <a:r>
+              <a:rPr lang="en-US" sz="1200" dirty="0">
+                <a:solidFill>
+                  <a:srgbClr val="FFFFFF"/>
+                </a:solidFill>
+                <a:latin typeface="Meiryo" pitchFamily="34" charset="0"/>
+                <a:ea typeface="Meiryo" pitchFamily="34" charset="-122"/>
+                <a:cs typeface="Meiryo" pitchFamily="34" charset="-120"/>
+              </a:rPr>
+              <a:t>💡 </a:t>
+            </a:r>
+            <a:pPr indent="0" marL="0">
+              <a:buNone/>
+            </a:pPr>
+            <a:r>
+              <a:rPr lang="en-US" sz="1100" dirty="0">
+                <a:solidFill>
+                  <a:srgbClr val="CADCFC"/>
+                </a:solidFill>
+                <a:latin typeface="Meiryo" pitchFamily="34" charset="0"/>
+                <a:ea typeface="Meiryo" pitchFamily="34" charset="-122"/>
+                <a:cs typeface="Meiryo" pitchFamily="34" charset="-120"/>
+              </a:rPr>
+              <a:t>バイブコーディングが悪いのではない。</a:t>
+            </a:r>
+            <a:pPr indent="0" marL="0">
+              <a:buNone/>
+            </a:pPr>
+            <a:r>
+              <a:rPr lang="en-US" sz="1100" b="1" dirty="0">
+                <a:solidFill>
+                  <a:srgbClr val="FFFFFF"/>
+                </a:solidFill>
+                <a:latin typeface="Meiryo" pitchFamily="34" charset="0"/>
+                <a:ea typeface="Meiryo" pitchFamily="34" charset="-122"/>
+                <a:cs typeface="Meiryo" pitchFamily="34" charset="-120"/>
+              </a:rPr>
+              <a:t> プロトタイプには最適。だが業務コードには「型」が要る</a:t>
+            </a:r>
+            <a:endParaRPr lang="en-US" sz="1100" dirty="0"/>
+          </a:p>
+        </p:txBody>
+      </p:sp>
+      <p:sp>
+        <p:nvSpPr>
+          <p:cNvPr id="22" name="Text 20"/>
+          <p:cNvSpPr/>
+          <p:nvPr/>
+        </p:nvSpPr>
+        <p:spPr>
+          <a:xfrm>
+            <a:off x="5486400" y="4828032"/>
+            <a:ext cx="3474720" cy="228600"/>
+          </a:xfrm>
+          <a:prstGeom prst="rect">
+            <a:avLst/>
+          </a:prstGeom>
+          <a:noFill/>
+          <a:ln/>
+        </p:spPr>
+        <p:txBody>
+          <a:bodyPr wrap="square" rtlCol="0" anchor="ctr"/>
+          <a:lstStyle/>
+          <a:p>
+            <a:pPr algn="r" indent="0" marL="0">
+              <a:buNone/>
+            </a:pPr>
+            <a:r>
+              <a:rPr lang="en-US" sz="1000" spc="100" kern="0" dirty="0">
+                <a:solidFill>
+                  <a:srgbClr val="64748B"/>
+                </a:solidFill>
+                <a:latin typeface="Arial" pitchFamily="34" charset="0"/>
+                <a:ea typeface="Arial" pitchFamily="34" charset="-122"/>
+                <a:cs typeface="Arial" pitchFamily="34" charset="-120"/>
+              </a:rPr>
+              <a:t>○ ○ ○ ○ ● ○ ○ ○ ○ ○</a:t>
+            </a:r>
+            <a:endParaRPr lang="en-US" sz="1000" dirty="0"/>
+          </a:p>
+        </p:txBody>
+      </p:sp>
+    </p:spTree>
+  </p:cSld>
+  <p:clrMapOvr>
+    <a:masterClrMapping/>
+  </p:clrMapOvr>
+</p:sld>
+</file>
+
+<file path=ppt/slides/slide11.xml><?xml version="1.0" encoding="utf-8"?>
 <p:sld xmlns:a="http://schemas.openxmlformats.org/drawingml/2006/main" xmlns:r="http://schemas.openxmlformats.org/officeDocument/2006/relationships" xmlns:p="http://schemas.openxmlformats.org/presentationml/2006/main">
   <p:cSld name="Slide 10">
     <p:bg>
@@ -2351,6 +3269,10 @@
             <a:prstDash val="solid"/>
           </a:ln>
         </p:spPr>
+        <p:txBody>
+          <a:bodyPr/>
+          <a:p/>
+        </p:txBody>
       </p:sp>
       <p:sp>
         <p:nvSpPr>
@@ -2376,6 +3298,10 @@
             <a:prstDash val="solid"/>
           </a:ln>
         </p:spPr>
+        <p:txBody>
+          <a:bodyPr/>
+          <a:p/>
+        </p:txBody>
       </p:sp>
       <p:sp>
         <p:nvSpPr>
@@ -2401,6 +3327,10 @@
             <a:prstDash val="solid"/>
           </a:ln>
         </p:spPr>
+        <p:txBody>
+          <a:bodyPr/>
+          <a:p/>
+        </p:txBody>
       </p:sp>
       <p:sp>
         <p:nvSpPr>
@@ -2638,6 +3568,10 @@
             <a:prstDash val="solid"/>
           </a:ln>
         </p:spPr>
+        <p:txBody>
+          <a:bodyPr/>
+          <a:p/>
+        </p:txBody>
       </p:sp>
       <p:sp>
         <p:nvSpPr>
@@ -2663,6 +3597,10 @@
             <a:prstDash val="solid"/>
           </a:ln>
         </p:spPr>
+        <p:txBody>
+          <a:bodyPr/>
+          <a:p/>
+        </p:txBody>
       </p:sp>
       <p:sp>
         <p:nvSpPr>
@@ -2900,6 +3838,10 @@
             <a:prstDash val="solid"/>
           </a:ln>
         </p:spPr>
+        <p:txBody>
+          <a:bodyPr/>
+          <a:p/>
+        </p:txBody>
       </p:sp>
       <p:sp>
         <p:nvSpPr>
@@ -2925,6 +3867,10 @@
             <a:prstDash val="solid"/>
           </a:ln>
         </p:spPr>
+        <p:txBody>
+          <a:bodyPr/>
+          <a:p/>
+        </p:txBody>
       </p:sp>
       <p:sp>
         <p:nvSpPr>
@@ -3162,6 +4108,10 @@
             <a:prstDash val="solid"/>
           </a:ln>
         </p:spPr>
+        <p:txBody>
+          <a:bodyPr/>
+          <a:p/>
+        </p:txBody>
       </p:sp>
       <p:sp>
         <p:nvSpPr>
@@ -3187,6 +4137,10 @@
             <a:prstDash val="solid"/>
           </a:ln>
         </p:spPr>
+        <p:txBody>
+          <a:bodyPr/>
+          <a:p/>
+        </p:txBody>
       </p:sp>
       <p:sp>
         <p:nvSpPr>
@@ -3447,7 +4401,7 @@
 </p:sld>
 </file>
 
-<file path=ppt/slides/slide11.xml><?xml version="1.0" encoding="utf-8"?>
+<file path=ppt/slides/slide12.xml><?xml version="1.0" encoding="utf-8"?>
 <p:sld xmlns:a="http://schemas.openxmlformats.org/drawingml/2006/main" xmlns:r="http://schemas.openxmlformats.org/officeDocument/2006/relationships" xmlns:p="http://schemas.openxmlformats.org/presentationml/2006/main">
   <p:cSld name="Slide 11">
     <p:bg>
@@ -3573,6 +4527,10 @@
             <a:prstDash val="solid"/>
           </a:ln>
         </p:spPr>
+        <p:txBody>
+          <a:bodyPr/>
+          <a:p/>
+        </p:txBody>
       </p:sp>
       <p:sp>
         <p:nvSpPr>
@@ -3594,6 +4552,21 @@
         <p:txBody>
           <a:bodyPr wrap="square" lIns="0" tIns="0" rIns="0" bIns="0" rtlCol="0" anchor="t"/>
           <a:lstStyle/>
+          <a:p>
+            <a:pPr algn="ctr"/>
+            <a:r>
+              <a:rPr lang="ja-JP" sz="2200" b="1">
+                <a:solidFill>
+                  <a:srgbClr val="FFC800"/>
+                </a:solidFill>
+                <a:latin typeface="+mj-lt"/>
+              </a:rPr>
+              <a:t>★ 「計画を書いてからAIに渡す」</a:t>
+            </a:r>
+          </a:p>
+          <a:p>
+            <a:endParaRPr lang="ja-JP" sz="800"/>
+          </a:p>
           <a:p>
             <a:pPr indent="0" marL="0">
               <a:spcAft>
@@ -3731,6 +4704,10 @@
             <a:prstDash val="solid"/>
           </a:ln>
         </p:spPr>
+        <p:txBody>
+          <a:bodyPr/>
+          <a:p/>
+        </p:txBody>
       </p:sp>
       <p:sp>
         <p:nvSpPr>
@@ -3795,6 +4772,10 @@
             <a:prstDash val="solid"/>
           </a:ln>
         </p:spPr>
+        <p:txBody>
+          <a:bodyPr/>
+          <a:p/>
+        </p:txBody>
       </p:sp>
       <p:sp>
         <p:nvSpPr>
@@ -3859,6 +4840,10 @@
             <a:prstDash val="solid"/>
           </a:ln>
         </p:spPr>
+        <p:txBody>
+          <a:bodyPr/>
+          <a:p/>
+        </p:txBody>
       </p:sp>
       <p:sp>
         <p:nvSpPr>
@@ -3923,6 +4908,10 @@
             <a:prstDash val="solid"/>
           </a:ln>
         </p:spPr>
+        <p:txBody>
+          <a:bodyPr/>
+          <a:p/>
+        </p:txBody>
       </p:sp>
       <p:sp>
         <p:nvSpPr>
@@ -3987,6 +4976,10 @@
             <a:prstDash val="solid"/>
           </a:ln>
         </p:spPr>
+        <p:txBody>
+          <a:bodyPr/>
+          <a:p/>
+        </p:txBody>
       </p:sp>
       <p:sp>
         <p:nvSpPr>
@@ -4024,6 +5017,39 @@
               <a:t>自分の現在地（バイブ/SDD/AIDLC）がイメージできた</a:t>
             </a:r>
             <a:endParaRPr lang="en-US" sz="1100" dirty="0"/>
+          </a:p>
+        </p:txBody>
+      </p:sp>
+      <p:sp>
+        <p:nvSpPr>
+          <p:cNvPr id="16" name="TextBox 15"/>
+          <p:cNvSpPr txBox="1"/>
+          <p:nvPr/>
+        </p:nvSpPr>
+        <p:spPr>
+          <a:xfrm>
+            <a:off x="457200" y="4900000"/>
+            <a:ext cx="8229600" cy="220000"/>
+          </a:xfrm>
+          <a:prstGeom prst="rect">
+            <a:avLst/>
+          </a:prstGeom>
+          <a:noFill/>
+        </p:spPr>
+        <p:txBody>
+          <a:bodyPr wrap="square" lIns="0" rIns="0" tIns="0" bIns="0">
+            <a:spAutoFit/>
+          </a:bodyPr>
+          <a:lstStyle/>
+          <a:p>
+            <a:r>
+              <a:rPr sz="1100" b="1">
+                <a:solidFill>
+                  <a:srgbClr val="FFC800"/>
+                </a:solidFill>
+              </a:rPr>
+              <a:t>3原則の現在地：  01 分ける ✅    02 防ぐ ✅    03 残す →    （残すへの橋渡し）</a:t>
+            </a:r>
           </a:p>
         </p:txBody>
       </p:sp>
@@ -4035,7 +5061,7 @@
 </p:sld>
 </file>
 
-<file path=ppt/slides/slide12.xml><?xml version="1.0" encoding="utf-8"?>
+<file path=ppt/slides/slide13.xml><?xml version="1.0" encoding="utf-8"?>
 <p:sld xmlns:a="http://schemas.openxmlformats.org/drawingml/2006/main" xmlns:r="http://schemas.openxmlformats.org/officeDocument/2006/relationships" xmlns:p="http://schemas.openxmlformats.org/presentationml/2006/main">
   <p:cSld name="Slide 12">
     <p:bg>
@@ -4686,6 +5712,264 @@
 </file>
 
 <file path=ppt/slides/slide2.xml><?xml version="1.0" encoding="utf-8"?>
+<p:sld xmlns:a="http://schemas.openxmlformats.org/drawingml/2006/main" xmlns:p="http://schemas.openxmlformats.org/presentationml/2006/main" xmlns:r="http://schemas.openxmlformats.org/officeDocument/2006/relationships">
+  <p:cSld>
+    <p:bg>
+      <p:bgPr>
+        <a:solidFill>
+          <a:srgbClr val="FFFFFF"/>
+        </a:solidFill>
+        <a:effectLst/>
+      </p:bgPr>
+    </p:bg>
+    <p:spTree>
+      <p:nvGrpSpPr>
+        <p:cNvPr id="1" name=""/>
+        <p:cNvGrpSpPr/>
+        <p:nvPr/>
+      </p:nvGrpSpPr>
+      <p:grpSpPr/>
+      <p:sp>
+        <p:nvSpPr>
+          <p:cNvPr id="2" name="TextBox 1"/>
+          <p:cNvSpPr txBox="1"/>
+          <p:nvPr/>
+        </p:nvSpPr>
+        <p:spPr>
+          <a:xfrm>
+            <a:off x="457200" y="320040"/>
+            <a:ext cx="8229600" cy="548640"/>
+          </a:xfrm>
+          <a:prstGeom prst="rect">
+            <a:avLst/>
+          </a:prstGeom>
+          <a:noFill/>
+        </p:spPr>
+        <p:txBody>
+          <a:bodyPr wrap="square" lIns="0" rIns="0" tIns="0" bIns="0">
+            <a:spAutoFit/>
+          </a:bodyPr>
+          <a:lstStyle/>
+          <a:p>
+            <a:r>
+              <a:rPr sz="2600" b="1" i="0">
+                <a:solidFill>
+                  <a:srgbClr val="1E2761"/>
+                </a:solidFill>
+              </a:rPr>
+              <a:t>今日の用語ミニ辞典 ― 迷ったらここに戻る</a:t>
+            </a:r>
+          </a:p>
+        </p:txBody>
+      </p:sp>
+      <p:sp>
+        <p:nvSpPr>
+          <p:cNvPr id="3" name="TextBox 2"/>
+          <p:cNvSpPr txBox="1"/>
+          <p:nvPr/>
+        </p:nvSpPr>
+        <p:spPr>
+          <a:xfrm>
+            <a:off x="457200" y="960000"/>
+            <a:ext cx="8229600" cy="330000"/>
+          </a:xfrm>
+          <a:prstGeom prst="rect">
+            <a:avLst/>
+          </a:prstGeom>
+          <a:noFill/>
+        </p:spPr>
+        <p:txBody>
+          <a:bodyPr wrap="square" lIns="0" rIns="0" tIns="0" bIns="0">
+            <a:spAutoFit/>
+          </a:bodyPr>
+          <a:lstStyle/>
+          <a:p>
+            <a:r>
+              <a:rPr sz="1300" b="0" i="1">
+                <a:solidFill>
+                  <a:srgbClr val="64748B"/>
+                </a:solidFill>
+              </a:rPr>
+              <a:t>今日のスライドで初めて出てくるカタカナ語を1行で説明</a:t>
+            </a:r>
+          </a:p>
+        </p:txBody>
+      </p:sp>
+      <p:sp>
+        <p:nvSpPr>
+          <p:cNvPr id="4" name="TextBox 3"/>
+          <p:cNvSpPr txBox="1"/>
+          <p:nvPr/>
+        </p:nvSpPr>
+        <p:spPr>
+          <a:xfrm>
+            <a:off x="457200" y="1450000"/>
+            <a:ext cx="8229600" cy="3500000"/>
+          </a:xfrm>
+          <a:prstGeom prst="rect">
+            <a:avLst/>
+          </a:prstGeom>
+          <a:noFill/>
+        </p:spPr>
+        <p:txBody>
+          <a:bodyPr wrap="square" lIns="0" rIns="0" tIns="0" bIns="0">
+            <a:spAutoFit/>
+          </a:bodyPr>
+          <a:lstStyle/>
+          <a:p>
+            <a:r>
+              <a:rPr sz="1600" b="1">
+                <a:solidFill>
+                  <a:srgbClr val="1E2761"/>
+                </a:solidFill>
+              </a:rPr>
+              <a:t>●  バイブコーディング</a:t>
+            </a:r>
+            <a:r>
+              <a:rPr sz="1400" b="0">
+                <a:solidFill>
+                  <a:srgbClr val="2D3748"/>
+                </a:solidFill>
+              </a:rPr>
+              <a:t>　＝　思いつきで指示してAIに即生成させるやり方</a:t>
+            </a:r>
+          </a:p>
+          <a:p>
+            <a:pPr>
+              <a:spcBef>
+                <a:spcPts val="800"/>
+              </a:spcBef>
+            </a:pPr>
+            <a:r>
+              <a:rPr sz="1600" b="1">
+                <a:solidFill>
+                  <a:srgbClr val="1E2761"/>
+                </a:solidFill>
+              </a:rPr>
+              <a:t>●  SDD</a:t>
+            </a:r>
+            <a:r>
+              <a:rPr sz="1400" b="0">
+                <a:solidFill>
+                  <a:srgbClr val="2D3748"/>
+                </a:solidFill>
+              </a:rPr>
+              <a:t>　＝　仕様書を先に書いてからコードを書かせる方式</a:t>
+            </a:r>
+          </a:p>
+          <a:p>
+            <a:pPr>
+              <a:spcBef>
+                <a:spcPts val="800"/>
+              </a:spcBef>
+            </a:pPr>
+            <a:r>
+              <a:rPr sz="1600" b="1">
+                <a:solidFill>
+                  <a:srgbClr val="1E2761"/>
+                </a:solidFill>
+              </a:rPr>
+              <a:t>●  AIDLC</a:t>
+            </a:r>
+            <a:r>
+              <a:rPr sz="1400" b="0">
+                <a:solidFill>
+                  <a:srgbClr val="2D3748"/>
+                </a:solidFill>
+              </a:rPr>
+              <a:t>　＝　AI開発を3段階(Inception/Construction/Operation)で管理する手法</a:t>
+            </a:r>
+          </a:p>
+          <a:p>
+            <a:pPr>
+              <a:spcBef>
+                <a:spcPts val="800"/>
+              </a:spcBef>
+            </a:pPr>
+            <a:r>
+              <a:rPr sz="1600" b="1">
+                <a:solidFill>
+                  <a:srgbClr val="1E2761"/>
+                </a:solidFill>
+              </a:rPr>
+              <a:t>●  ステアリングファイル</a:t>
+            </a:r>
+            <a:r>
+              <a:rPr sz="1400" b="0">
+                <a:solidFill>
+                  <a:srgbClr val="2D3748"/>
+                </a:solidFill>
+              </a:rPr>
+              <a:t>　＝　設計判断や規約をAIに参照させるファイル</a:t>
+            </a:r>
+          </a:p>
+          <a:p>
+            <a:pPr>
+              <a:spcBef>
+                <a:spcPts val="800"/>
+              </a:spcBef>
+            </a:pPr>
+            <a:r>
+              <a:rPr sz="1600" b="1">
+                <a:solidFill>
+                  <a:srgbClr val="1E2761"/>
+                </a:solidFill>
+              </a:rPr>
+              <a:t>●  スコープクリープ</a:t>
+            </a:r>
+            <a:r>
+              <a:rPr sz="1400" b="0">
+                <a:solidFill>
+                  <a:srgbClr val="2D3748"/>
+                </a:solidFill>
+              </a:rPr>
+              <a:t>　＝　やる範囲がじわじわ広がってしまう現象</a:t>
+            </a:r>
+          </a:p>
+        </p:txBody>
+      </p:sp>
+      <p:sp>
+        <p:nvSpPr>
+          <p:cNvPr id="5" name="TextBox 4"/>
+          <p:cNvSpPr txBox="1"/>
+          <p:nvPr/>
+        </p:nvSpPr>
+        <p:spPr>
+          <a:xfrm>
+            <a:off x="457200" y="4828032"/>
+            <a:ext cx="8229600" cy="228600"/>
+          </a:xfrm>
+          <a:prstGeom prst="rect">
+            <a:avLst/>
+          </a:prstGeom>
+          <a:noFill/>
+        </p:spPr>
+        <p:txBody>
+          <a:bodyPr wrap="square" lIns="0" rIns="0" tIns="0" bIns="0">
+            <a:spAutoFit/>
+          </a:bodyPr>
+          <a:lstStyle/>
+          <a:p>
+            <a:r>
+              <a:rPr sz="1000" b="0" i="1">
+                <a:solidFill>
+                  <a:srgbClr val="64748B"/>
+                </a:solidFill>
+              </a:rPr>
+              <a:t>★ 用語が分からなくなったらここへ戻ってください</a:t>
+            </a:r>
+          </a:p>
+        </p:txBody>
+      </p:sp>
+    </p:spTree>
+  </p:cSld>
+  <p:clrMapOvr>
+    <a:masterClrMapping/>
+  </p:clrMapOvr>
+</p:sld>
+</file>
+
+<file path=ppt/slides/slide3.xml><?xml version="1.0" encoding="utf-8"?>
 <p:sld xmlns:a="http://schemas.openxmlformats.org/drawingml/2006/main" xmlns:r="http://schemas.openxmlformats.org/officeDocument/2006/relationships" xmlns:p="http://schemas.openxmlformats.org/presentationml/2006/main">
   <p:cSld name="Slide 2">
     <p:bg>
@@ -4772,6 +6056,10 @@
             <a:prstDash val="solid"/>
           </a:ln>
         </p:spPr>
+        <p:txBody>
+          <a:bodyPr/>
+          <a:p/>
+        </p:txBody>
       </p:sp>
       <p:sp>
         <p:nvSpPr>
@@ -4836,6 +6124,10 @@
             <a:prstDash val="solid"/>
           </a:ln>
         </p:spPr>
+        <p:txBody>
+          <a:bodyPr/>
+          <a:p/>
+        </p:txBody>
       </p:sp>
       <p:sp>
         <p:nvSpPr>
@@ -4861,6 +6153,10 @@
             <a:prstDash val="solid"/>
           </a:ln>
         </p:spPr>
+        <p:txBody>
+          <a:bodyPr/>
+          <a:p/>
+        </p:txBody>
       </p:sp>
       <p:sp>
         <p:nvSpPr>
@@ -4987,6 +6283,10 @@
             <a:prstDash val="solid"/>
           </a:ln>
         </p:spPr>
+        <p:txBody>
+          <a:bodyPr/>
+          <a:p/>
+        </p:txBody>
       </p:sp>
       <p:sp>
         <p:nvSpPr>
@@ -5122,6 +6422,10 @@
             <a:prstDash val="solid"/>
           </a:ln>
         </p:spPr>
+        <p:txBody>
+          <a:bodyPr/>
+          <a:p/>
+        </p:txBody>
       </p:sp>
       <p:sp>
         <p:nvSpPr>
@@ -5232,7 +6536,7 @@
 </p:sld>
 </file>
 
-<file path=ppt/slides/slide3.xml><?xml version="1.0" encoding="utf-8"?>
+<file path=ppt/slides/slide4.xml><?xml version="1.0" encoding="utf-8"?>
 <p:sld xmlns:a="http://schemas.openxmlformats.org/drawingml/2006/main" xmlns:r="http://schemas.openxmlformats.org/officeDocument/2006/relationships" xmlns:p="http://schemas.openxmlformats.org/presentationml/2006/main">
   <p:cSld name="Slide 3">
     <p:bg>
@@ -5319,6 +6623,10 @@
             <a:prstDash val="solid"/>
           </a:ln>
         </p:spPr>
+        <p:txBody>
+          <a:bodyPr/>
+          <a:p/>
+        </p:txBody>
       </p:sp>
       <p:sp>
         <p:nvSpPr>
@@ -5383,6 +6691,10 @@
             <a:prstDash val="solid"/>
           </a:ln>
         </p:spPr>
+        <p:txBody>
+          <a:bodyPr/>
+          <a:p/>
+        </p:txBody>
       </p:sp>
       <p:sp>
         <p:nvSpPr>
@@ -5408,6 +6720,10 @@
             <a:prstDash val="solid"/>
           </a:ln>
         </p:spPr>
+        <p:txBody>
+          <a:bodyPr/>
+          <a:p/>
+        </p:txBody>
       </p:sp>
       <p:sp>
         <p:nvSpPr>
@@ -5601,6 +6917,10 @@
             <a:prstDash val="solid"/>
           </a:ln>
         </p:spPr>
+        <p:txBody>
+          <a:bodyPr/>
+          <a:p/>
+        </p:txBody>
       </p:sp>
       <p:sp>
         <p:nvSpPr>
@@ -5626,6 +6946,10 @@
             <a:prstDash val="solid"/>
           </a:ln>
         </p:spPr>
+        <p:txBody>
+          <a:bodyPr/>
+          <a:p/>
+        </p:txBody>
       </p:sp>
       <p:sp>
         <p:nvSpPr>
@@ -5819,6 +7143,10 @@
             <a:prstDash val="solid"/>
           </a:ln>
         </p:spPr>
+        <p:txBody>
+          <a:bodyPr/>
+          <a:p/>
+        </p:txBody>
       </p:sp>
       <p:sp>
         <p:nvSpPr>
@@ -5844,6 +7172,10 @@
             <a:prstDash val="solid"/>
           </a:ln>
         </p:spPr>
+        <p:txBody>
+          <a:bodyPr/>
+          <a:p/>
+        </p:txBody>
       </p:sp>
       <p:sp>
         <p:nvSpPr>
@@ -6037,6 +7369,10 @@
             <a:prstDash val="solid"/>
           </a:ln>
         </p:spPr>
+        <p:txBody>
+          <a:bodyPr/>
+          <a:p/>
+        </p:txBody>
       </p:sp>
       <p:sp>
         <p:nvSpPr>
@@ -6062,6 +7398,10 @@
             <a:prstDash val="solid"/>
           </a:ln>
         </p:spPr>
+        <p:txBody>
+          <a:bodyPr/>
+          <a:p/>
+        </p:txBody>
       </p:sp>
       <p:sp>
         <p:nvSpPr>
@@ -6255,6 +7595,10 @@
             <a:prstDash val="solid"/>
           </a:ln>
         </p:spPr>
+        <p:txBody>
+          <a:bodyPr/>
+          <a:p/>
+        </p:txBody>
       </p:sp>
       <p:sp>
         <p:nvSpPr>
@@ -6370,7 +7714,7 @@
 </p:sld>
 </file>
 
-<file path=ppt/slides/slide4.xml><?xml version="1.0" encoding="utf-8"?>
+<file path=ppt/slides/slide5.xml><?xml version="1.0" encoding="utf-8"?>
 <p:sld xmlns:a="http://schemas.openxmlformats.org/drawingml/2006/main" xmlns:r="http://schemas.openxmlformats.org/officeDocument/2006/relationships" xmlns:p="http://schemas.openxmlformats.org/presentationml/2006/main">
   <p:cSld name="Slide 4">
     <p:bg>
@@ -6457,6 +7801,10 @@
             <a:prstDash val="solid"/>
           </a:ln>
         </p:spPr>
+        <p:txBody>
+          <a:bodyPr/>
+          <a:p/>
+        </p:txBody>
       </p:sp>
       <p:sp>
         <p:nvSpPr>
@@ -6521,6 +7869,10 @@
             <a:prstDash val="solid"/>
           </a:ln>
         </p:spPr>
+        <p:txBody>
+          <a:bodyPr/>
+          <a:p/>
+        </p:txBody>
       </p:sp>
       <p:sp>
         <p:nvSpPr>
@@ -6641,6 +7993,10 @@
             <a:prstDash val="solid"/>
           </a:ln>
         </p:spPr>
+        <p:txBody>
+          <a:bodyPr/>
+          <a:p/>
+        </p:txBody>
       </p:sp>
       <p:sp>
         <p:nvSpPr>
@@ -6761,6 +8117,10 @@
             <a:prstDash val="solid"/>
           </a:ln>
         </p:spPr>
+        <p:txBody>
+          <a:bodyPr/>
+          <a:p/>
+        </p:txBody>
       </p:sp>
       <p:sp>
         <p:nvSpPr>
@@ -6881,6 +8241,10 @@
             <a:prstDash val="solid"/>
           </a:ln>
         </p:spPr>
+        <p:txBody>
+          <a:bodyPr/>
+          <a:p/>
+        </p:txBody>
       </p:sp>
       <p:sp>
         <p:nvSpPr>
@@ -7001,6 +8365,10 @@
             <a:prstDash val="solid"/>
           </a:ln>
         </p:spPr>
+        <p:txBody>
+          <a:bodyPr/>
+          <a:p/>
+        </p:txBody>
       </p:sp>
       <p:sp>
         <p:nvSpPr>
@@ -7121,6 +8489,10 @@
             <a:prstDash val="solid"/>
           </a:ln>
         </p:spPr>
+        <p:txBody>
+          <a:bodyPr/>
+          <a:p/>
+        </p:txBody>
       </p:sp>
       <p:sp>
         <p:nvSpPr>
@@ -7241,6 +8613,10 @@
             <a:prstDash val="solid"/>
           </a:ln>
         </p:spPr>
+        <p:txBody>
+          <a:bodyPr/>
+          <a:p/>
+        </p:txBody>
       </p:sp>
       <p:sp>
         <p:nvSpPr>
@@ -7361,6 +8737,10 @@
             <a:prstDash val="solid"/>
           </a:ln>
         </p:spPr>
+        <p:txBody>
+          <a:bodyPr/>
+          <a:p/>
+        </p:txBody>
       </p:sp>
       <p:sp>
         <p:nvSpPr>
@@ -7481,6 +8861,10 @@
             <a:prstDash val="solid"/>
           </a:ln>
         </p:spPr>
+        <p:txBody>
+          <a:bodyPr/>
+          <a:p/>
+        </p:txBody>
       </p:sp>
       <p:sp>
         <p:nvSpPr>
@@ -7601,6 +8985,10 @@
             <a:prstDash val="solid"/>
           </a:ln>
         </p:spPr>
+        <p:txBody>
+          <a:bodyPr/>
+          <a:p/>
+        </p:txBody>
       </p:sp>
       <p:sp>
         <p:nvSpPr>
@@ -7699,6 +9087,10 @@
             <a:prstDash val="solid"/>
           </a:ln>
         </p:spPr>
+        <p:txBody>
+          <a:bodyPr/>
+          <a:p/>
+        </p:txBody>
       </p:sp>
       <p:sp>
         <p:nvSpPr>
@@ -7814,7 +9206,7 @@
 </p:sld>
 </file>
 
-<file path=ppt/slides/slide5.xml><?xml version="1.0" encoding="utf-8"?>
+<file path=ppt/slides/slide6.xml><?xml version="1.0" encoding="utf-8"?>
 <p:sld xmlns:a="http://schemas.openxmlformats.org/drawingml/2006/main" xmlns:r="http://schemas.openxmlformats.org/officeDocument/2006/relationships" xmlns:p="http://schemas.openxmlformats.org/presentationml/2006/main">
   <p:cSld name="Slide 5">
     <p:bg>
@@ -7901,6 +9293,10 @@
             <a:prstDash val="solid"/>
           </a:ln>
         </p:spPr>
+        <p:txBody>
+          <a:bodyPr/>
+          <a:p/>
+        </p:txBody>
       </p:sp>
       <p:sp>
         <p:nvSpPr>
@@ -7965,6 +9361,10 @@
             <a:prstDash val="solid"/>
           </a:ln>
         </p:spPr>
+        <p:txBody>
+          <a:bodyPr/>
+          <a:p/>
+        </p:txBody>
       </p:sp>
       <p:sp>
         <p:nvSpPr>
@@ -7990,6 +9390,10 @@
             <a:prstDash val="solid"/>
           </a:ln>
         </p:spPr>
+        <p:txBody>
+          <a:bodyPr/>
+          <a:p/>
+        </p:txBody>
       </p:sp>
       <p:sp>
         <p:nvSpPr>
@@ -8160,6 +9564,10 @@
             <a:prstDash val="solid"/>
           </a:ln>
         </p:spPr>
+        <p:txBody>
+          <a:bodyPr/>
+          <a:p/>
+        </p:txBody>
       </p:sp>
       <p:sp>
         <p:nvSpPr>
@@ -8185,6 +9593,10 @@
             <a:prstDash val="solid"/>
           </a:ln>
         </p:spPr>
+        <p:txBody>
+          <a:bodyPr/>
+          <a:p/>
+        </p:txBody>
       </p:sp>
       <p:sp>
         <p:nvSpPr>
@@ -8334,6 +9746,10 @@
             <a:prstDash val="solid"/>
           </a:ln>
         </p:spPr>
+        <p:txBody>
+          <a:bodyPr/>
+          <a:p/>
+        </p:txBody>
       </p:sp>
       <p:sp>
         <p:nvSpPr>
@@ -8437,6 +9853,10 @@
             <a:prstDash val="solid"/>
           </a:ln>
         </p:spPr>
+        <p:txBody>
+          <a:bodyPr/>
+          <a:p/>
+        </p:txBody>
       </p:sp>
       <p:sp>
         <p:nvSpPr>
@@ -8540,6 +9960,10 @@
             <a:prstDash val="solid"/>
           </a:ln>
         </p:spPr>
+        <p:txBody>
+          <a:bodyPr/>
+          <a:p/>
+        </p:txBody>
       </p:sp>
       <p:sp>
         <p:nvSpPr>
@@ -8604,6 +10028,10 @@
             <a:prstDash val="solid"/>
           </a:ln>
         </p:spPr>
+        <p:txBody>
+          <a:bodyPr/>
+          <a:p/>
+        </p:txBody>
       </p:sp>
       <p:sp>
         <p:nvSpPr>
@@ -8719,7 +10147,7 @@
 </p:sld>
 </file>
 
-<file path=ppt/slides/slide6.xml><?xml version="1.0" encoding="utf-8"?>
+<file path=ppt/slides/slide7.xml><?xml version="1.0" encoding="utf-8"?>
 <p:sld xmlns:a="http://schemas.openxmlformats.org/drawingml/2006/main" xmlns:r="http://schemas.openxmlformats.org/officeDocument/2006/relationships" xmlns:p="http://schemas.openxmlformats.org/presentationml/2006/main">
   <p:cSld name="Slide 6">
     <p:bg>
@@ -8806,6 +10234,10 @@
             <a:prstDash val="solid"/>
           </a:ln>
         </p:spPr>
+        <p:txBody>
+          <a:bodyPr/>
+          <a:p/>
+        </p:txBody>
       </p:sp>
       <p:sp>
         <p:nvSpPr>
@@ -8870,6 +10302,10 @@
             <a:prstDash val="solid"/>
           </a:ln>
         </p:spPr>
+        <p:txBody>
+          <a:bodyPr/>
+          <a:p/>
+        </p:txBody>
       </p:sp>
       <p:sp>
         <p:nvSpPr>
@@ -8895,6 +10331,10 @@
             <a:prstDash val="solid"/>
           </a:ln>
         </p:spPr>
+        <p:txBody>
+          <a:bodyPr/>
+          <a:p/>
+        </p:txBody>
       </p:sp>
       <p:sp>
         <p:nvSpPr>
@@ -9044,6 +10484,10 @@
             <a:prstDash val="solid"/>
           </a:ln>
         </p:spPr>
+        <p:txBody>
+          <a:bodyPr/>
+          <a:p/>
+        </p:txBody>
       </p:sp>
       <p:sp>
         <p:nvSpPr>
@@ -9069,6 +10513,10 @@
             <a:prstDash val="solid"/>
           </a:ln>
         </p:spPr>
+        <p:txBody>
+          <a:bodyPr/>
+          <a:p/>
+        </p:txBody>
       </p:sp>
       <p:sp>
         <p:nvSpPr>
@@ -9172,6 +10620,10 @@
             <a:prstDash val="solid"/>
           </a:ln>
         </p:spPr>
+        <p:txBody>
+          <a:bodyPr/>
+          <a:p/>
+        </p:txBody>
       </p:sp>
       <p:sp>
         <p:nvSpPr>
@@ -9292,6 +10744,10 @@
             <a:prstDash val="solid"/>
           </a:ln>
         </p:spPr>
+        <p:txBody>
+          <a:bodyPr/>
+          <a:p/>
+        </p:txBody>
       </p:sp>
       <p:sp>
         <p:nvSpPr>
@@ -9390,6 +10846,10 @@
             <a:prstDash val="solid"/>
           </a:ln>
         </p:spPr>
+        <p:txBody>
+          <a:bodyPr/>
+          <a:p/>
+        </p:txBody>
       </p:sp>
       <p:sp>
         <p:nvSpPr>
@@ -9424,7 +10884,7 @@
                 <a:ea typeface="Meiryo" pitchFamily="34" charset="-122"/>
                 <a:cs typeface="Meiryo" pitchFamily="34" charset="-120"/>
               </a:rPr>
-              <a:t>💡 </a:t>
+              <a:t>→ 構造化ノートとCLAUDE.mdの使い分けは FAQ Q2-3</a:t>
             </a:r>
             <a:pPr indent="0" marL="0">
               <a:buNone/>
@@ -9438,7 +10898,7 @@
                 <a:ea typeface="Meiryo" pitchFamily="34" charset="-122"/>
                 <a:cs typeface="Meiryo" pitchFamily="34" charset="-120"/>
               </a:rPr>
-              <a:t>「コンテキストウィンドウの中身は揮発する。ファイルは残る。」</a:t>
+              <a:t/>
             </a:r>
             <a:pPr indent="0" marL="0">
               <a:buNone/>
@@ -9452,7 +10912,7 @@
                 <a:ea typeface="Meiryo" pitchFamily="34" charset="-122"/>
                 <a:cs typeface="Meiryo" pitchFamily="34" charset="-120"/>
               </a:rPr>
-              <a:t>（第4回の復習）</a:t>
+              <a:t/>
             </a:r>
             <a:endParaRPr lang="en-US" sz="1100" dirty="0"/>
           </a:p>
@@ -9505,7 +10965,7 @@
 </p:sld>
 </file>
 
-<file path=ppt/slides/slide7.xml><?xml version="1.0" encoding="utf-8"?>
+<file path=ppt/slides/slide8.xml><?xml version="1.0" encoding="utf-8"?>
 <p:sld xmlns:a="http://schemas.openxmlformats.org/drawingml/2006/main" xmlns:r="http://schemas.openxmlformats.org/officeDocument/2006/relationships" xmlns:p="http://schemas.openxmlformats.org/presentationml/2006/main">
   <p:cSld name="Slide 7">
     <p:bg>
@@ -9592,6 +11052,10 @@
             <a:prstDash val="solid"/>
           </a:ln>
         </p:spPr>
+        <p:txBody>
+          <a:bodyPr/>
+          <a:p/>
+        </p:txBody>
       </p:sp>
       <p:sp>
         <p:nvSpPr>
@@ -9656,6 +11120,10 @@
             <a:prstDash val="solid"/>
           </a:ln>
         </p:spPr>
+        <p:txBody>
+          <a:bodyPr/>
+          <a:p/>
+        </p:txBody>
       </p:sp>
       <p:sp>
         <p:nvSpPr>
@@ -9681,6 +11149,10 @@
             <a:prstDash val="solid"/>
           </a:ln>
         </p:spPr>
+        <p:txBody>
+          <a:bodyPr/>
+          <a:p/>
+        </p:txBody>
       </p:sp>
       <p:sp>
         <p:nvSpPr>
@@ -9706,6 +11178,10 @@
             <a:prstDash val="solid"/>
           </a:ln>
         </p:spPr>
+        <p:txBody>
+          <a:bodyPr/>
+          <a:p/>
+        </p:txBody>
       </p:sp>
       <p:sp>
         <p:nvSpPr>
@@ -9882,6 +11358,10 @@
             <a:prstDash val="solid"/>
           </a:ln>
         </p:spPr>
+        <p:txBody>
+          <a:bodyPr/>
+          <a:p/>
+        </p:txBody>
       </p:sp>
       <p:sp>
         <p:nvSpPr>
@@ -9907,6 +11387,10 @@
             <a:prstDash val="solid"/>
           </a:ln>
         </p:spPr>
+        <p:txBody>
+          <a:bodyPr/>
+          <a:p/>
+        </p:txBody>
       </p:sp>
       <p:sp>
         <p:nvSpPr>
@@ -9932,6 +11416,10 @@
             <a:prstDash val="solid"/>
           </a:ln>
         </p:spPr>
+        <p:txBody>
+          <a:bodyPr/>
+          <a:p/>
+        </p:txBody>
       </p:sp>
       <p:sp>
         <p:nvSpPr>
@@ -10091,6 +11579,10 @@
             <a:prstDash val="solid"/>
           </a:ln>
         </p:spPr>
+        <p:txBody>
+          <a:bodyPr/>
+          <a:p/>
+        </p:txBody>
       </p:sp>
       <p:sp>
         <p:nvSpPr>
@@ -10116,6 +11608,10 @@
             <a:prstDash val="solid"/>
           </a:ln>
         </p:spPr>
+        <p:txBody>
+          <a:bodyPr/>
+          <a:p/>
+        </p:txBody>
       </p:sp>
       <p:sp>
         <p:nvSpPr>
@@ -10141,6 +11637,10 @@
             <a:prstDash val="solid"/>
           </a:ln>
         </p:spPr>
+        <p:txBody>
+          <a:bodyPr/>
+          <a:p/>
+        </p:txBody>
       </p:sp>
       <p:sp>
         <p:nvSpPr>
@@ -10300,6 +11800,10 @@
             <a:prstDash val="solid"/>
           </a:ln>
         </p:spPr>
+        <p:txBody>
+          <a:bodyPr/>
+          <a:p/>
+        </p:txBody>
       </p:sp>
       <p:sp>
         <p:nvSpPr>
@@ -10334,7 +11838,7 @@
                 <a:ea typeface="Meiryo" pitchFamily="34" charset="-122"/>
                 <a:cs typeface="Meiryo" pitchFamily="34" charset="-120"/>
               </a:rPr>
-              <a:t>💡 </a:t>
+              <a:t>→ タスク分解の粒度は FAQ Q2-4</a:t>
             </a:r>
             <a:pPr indent="0" marL="0">
               <a:buNone/>
@@ -10348,7 +11852,7 @@
                 <a:ea typeface="Meiryo" pitchFamily="34" charset="-122"/>
                 <a:cs typeface="Meiryo" pitchFamily="34" charset="-120"/>
               </a:rPr>
-              <a:t>「速く作れる」ことと「正しく作れる」ことをつなぐのが計画。</a:t>
+              <a:t/>
             </a:r>
             <a:endParaRPr lang="en-US" sz="1100" dirty="0"/>
           </a:p>
@@ -10401,7 +11905,7 @@
 </p:sld>
 </file>
 
-<file path=ppt/slides/slide8.xml><?xml version="1.0" encoding="utf-8"?>
+<file path=ppt/slides/slide9.xml><?xml version="1.0" encoding="utf-8"?>
 <p:sld xmlns:a="http://schemas.openxmlformats.org/drawingml/2006/main" xmlns:r="http://schemas.openxmlformats.org/officeDocument/2006/relationships" xmlns:p="http://schemas.openxmlformats.org/presentationml/2006/main">
   <p:cSld name="Slide 8">
     <p:bg>
@@ -10488,6 +11992,10 @@
             <a:prstDash val="solid"/>
           </a:ln>
         </p:spPr>
+        <p:txBody>
+          <a:bodyPr/>
+          <a:p/>
+        </p:txBody>
       </p:sp>
       <p:sp>
         <p:nvSpPr>
@@ -10552,6 +12060,10 @@
             <a:prstDash val="solid"/>
           </a:ln>
         </p:spPr>
+        <p:txBody>
+          <a:bodyPr/>
+          <a:p/>
+        </p:txBody>
       </p:sp>
       <p:sp>
         <p:nvSpPr>
@@ -10577,6 +12089,10 @@
             <a:prstDash val="solid"/>
           </a:ln>
         </p:spPr>
+        <p:txBody>
+          <a:bodyPr/>
+          <a:p/>
+        </p:txBody>
       </p:sp>
       <p:sp>
         <p:nvSpPr>
@@ -10726,6 +12242,10 @@
             <a:prstDash val="solid"/>
           </a:ln>
         </p:spPr>
+        <p:txBody>
+          <a:bodyPr/>
+          <a:p/>
+        </p:txBody>
       </p:sp>
       <p:sp>
         <p:nvSpPr>
@@ -10751,6 +12271,10 @@
             <a:prstDash val="solid"/>
           </a:ln>
         </p:spPr>
+        <p:txBody>
+          <a:bodyPr/>
+          <a:p/>
+        </p:txBody>
       </p:sp>
       <p:sp>
         <p:nvSpPr>
@@ -11024,6 +12548,10 @@
             <a:prstDash val="solid"/>
           </a:ln>
         </p:spPr>
+        <p:txBody>
+          <a:bodyPr/>
+          <a:p/>
+        </p:txBody>
       </p:sp>
       <p:sp>
         <p:nvSpPr>
@@ -11109,866 +12637,6 @@
       <p:sp>
         <p:nvSpPr>
           <p:cNvPr id="17" name="Text 15"/>
-          <p:cNvSpPr/>
-          <p:nvPr/>
-        </p:nvSpPr>
-        <p:spPr>
-          <a:xfrm>
-            <a:off x="5486400" y="4828032"/>
-            <a:ext cx="3474720" cy="228600"/>
-          </a:xfrm>
-          <a:prstGeom prst="rect">
-            <a:avLst/>
-          </a:prstGeom>
-          <a:noFill/>
-          <a:ln/>
-        </p:spPr>
-        <p:txBody>
-          <a:bodyPr wrap="square" rtlCol="0" anchor="ctr"/>
-          <a:lstStyle/>
-          <a:p>
-            <a:pPr algn="r" indent="0" marL="0">
-              <a:buNone/>
-            </a:pPr>
-            <a:r>
-              <a:rPr lang="en-US" sz="1000" spc="100" kern="0" dirty="0">
-                <a:solidFill>
-                  <a:srgbClr val="64748B"/>
-                </a:solidFill>
-                <a:latin typeface="Arial" pitchFamily="34" charset="0"/>
-                <a:ea typeface="Arial" pitchFamily="34" charset="-122"/>
-                <a:cs typeface="Arial" pitchFamily="34" charset="-120"/>
-              </a:rPr>
-              <a:t>○ ○ ○ ○ ● ○ ○ ○ ○ ○</a:t>
-            </a:r>
-            <a:endParaRPr lang="en-US" sz="1000" dirty="0"/>
-          </a:p>
-        </p:txBody>
-      </p:sp>
-    </p:spTree>
-  </p:cSld>
-  <p:clrMapOvr>
-    <a:masterClrMapping/>
-  </p:clrMapOvr>
-</p:sld>
-</file>
-
-<file path=ppt/slides/slide9.xml><?xml version="1.0" encoding="utf-8"?>
-<p:sld xmlns:a="http://schemas.openxmlformats.org/drawingml/2006/main" xmlns:r="http://schemas.openxmlformats.org/officeDocument/2006/relationships" xmlns:p="http://schemas.openxmlformats.org/presentationml/2006/main">
-  <p:cSld name="Slide 9">
-    <p:bg>
-      <p:bgPr>
-        <a:solidFill>
-          <a:srgbClr val="FFFFFF"/>
-        </a:solidFill>
-      </p:bgPr>
-    </p:bg>
-    <p:spTree>
-      <p:nvGrpSpPr>
-        <p:cNvPr id="1" name=""/>
-        <p:cNvGrpSpPr/>
-        <p:nvPr/>
-      </p:nvGrpSpPr>
-      <p:grpSpPr>
-        <a:xfrm>
-          <a:off x="0" y="0"/>
-          <a:ext cx="0" cy="0"/>
-          <a:chOff x="0" y="0"/>
-          <a:chExt cx="0" cy="0"/>
-        </a:xfrm>
-      </p:grpSpPr>
-      <p:sp>
-        <p:nvSpPr>
-          <p:cNvPr id="2" name="Text 0"/>
-          <p:cNvSpPr/>
-          <p:nvPr/>
-        </p:nvSpPr>
-        <p:spPr>
-          <a:xfrm>
-            <a:off x="457200" y="320040"/>
-            <a:ext cx="8229600" cy="548640"/>
-          </a:xfrm>
-          <a:prstGeom prst="rect">
-            <a:avLst/>
-          </a:prstGeom>
-          <a:noFill/>
-          <a:ln/>
-        </p:spPr>
-        <p:txBody>
-          <a:bodyPr wrap="square" lIns="0" tIns="0" rIns="0" bIns="0" rtlCol="0" anchor="ctr"/>
-          <a:lstStyle/>
-          <a:p>
-            <a:pPr indent="0" marL="0">
-              <a:buNone/>
-            </a:pPr>
-            <a:r>
-              <a:rPr lang="en-US" sz="2600" b="1" dirty="0">
-                <a:solidFill>
-                  <a:srgbClr val="1E2761"/>
-                </a:solidFill>
-                <a:latin typeface="Arial Black" pitchFamily="34" charset="0"/>
-                <a:ea typeface="Arial Black" pitchFamily="34" charset="-122"/>
-                <a:cs typeface="Arial Black" pitchFamily="34" charset="-120"/>
-              </a:rPr>
-              <a:t>AI開発の3段階成熟度モデル</a:t>
-            </a:r>
-            <a:endParaRPr lang="en-US" sz="2600" dirty="0"/>
-          </a:p>
-        </p:txBody>
-      </p:sp>
-      <p:sp>
-        <p:nvSpPr>
-          <p:cNvPr id="3" name="Shape 1"/>
-          <p:cNvSpPr/>
-          <p:nvPr/>
-        </p:nvSpPr>
-        <p:spPr>
-          <a:xfrm>
-            <a:off x="457200" y="932688"/>
-            <a:ext cx="548640" cy="45720"/>
-          </a:xfrm>
-          <a:prstGeom prst="rect">
-            <a:avLst/>
-          </a:prstGeom>
-          <a:solidFill>
-            <a:srgbClr val="F96167"/>
-          </a:solidFill>
-          <a:ln w="12700">
-            <a:solidFill>
-              <a:srgbClr val="F96167"/>
-            </a:solidFill>
-            <a:prstDash val="solid"/>
-          </a:ln>
-        </p:spPr>
-      </p:sp>
-      <p:sp>
-        <p:nvSpPr>
-          <p:cNvPr id="4" name="Text 2"/>
-          <p:cNvSpPr/>
-          <p:nvPr/>
-        </p:nvSpPr>
-        <p:spPr>
-          <a:xfrm>
-            <a:off x="457200" y="1051560"/>
-            <a:ext cx="8229600" cy="274320"/>
-          </a:xfrm>
-          <a:prstGeom prst="rect">
-            <a:avLst/>
-          </a:prstGeom>
-          <a:noFill/>
-          <a:ln/>
-        </p:spPr>
-        <p:txBody>
-          <a:bodyPr wrap="square" lIns="0" tIns="0" rIns="0" bIns="0" rtlCol="0" anchor="ctr"/>
-          <a:lstStyle/>
-          <a:p>
-            <a:pPr indent="0" marL="0">
-              <a:buNone/>
-            </a:pPr>
-            <a:r>
-              <a:rPr lang="en-US" sz="1300" i="1" dirty="0">
-                <a:solidFill>
-                  <a:srgbClr val="64748B"/>
-                </a:solidFill>
-                <a:latin typeface="Meiryo" pitchFamily="34" charset="0"/>
-                <a:ea typeface="Meiryo" pitchFamily="34" charset="-122"/>
-                <a:cs typeface="Meiryo" pitchFamily="34" charset="-120"/>
-              </a:rPr>
-              <a:t>自分の現在地を知り、次のレベルに進む</a:t>
-            </a:r>
-            <a:endParaRPr lang="en-US" sz="1300" dirty="0"/>
-          </a:p>
-        </p:txBody>
-      </p:sp>
-      <p:sp>
-        <p:nvSpPr>
-          <p:cNvPr id="5" name="Shape 3"/>
-          <p:cNvSpPr/>
-          <p:nvPr/>
-        </p:nvSpPr>
-        <p:spPr>
-          <a:xfrm>
-            <a:off x="457200" y="3300984"/>
-            <a:ext cx="8229600" cy="868680"/>
-          </a:xfrm>
-          <a:prstGeom prst="rect">
-            <a:avLst/>
-          </a:prstGeom>
-          <a:solidFill>
-            <a:srgbClr val="F8F9FC"/>
-          </a:solidFill>
-          <a:ln w="9525">
-            <a:solidFill>
-              <a:srgbClr val="E5E9F2"/>
-            </a:solidFill>
-            <a:prstDash val="solid"/>
-          </a:ln>
-        </p:spPr>
-      </p:sp>
-      <p:sp>
-        <p:nvSpPr>
-          <p:cNvPr id="6" name="Text 4"/>
-          <p:cNvSpPr/>
-          <p:nvPr/>
-        </p:nvSpPr>
-        <p:spPr>
-          <a:xfrm>
-            <a:off x="640080" y="3300984"/>
-            <a:ext cx="1097280" cy="434340"/>
-          </a:xfrm>
-          <a:prstGeom prst="rect">
-            <a:avLst/>
-          </a:prstGeom>
-          <a:noFill/>
-          <a:ln/>
-        </p:spPr>
-        <p:txBody>
-          <a:bodyPr wrap="square" lIns="0" tIns="0" rIns="0" bIns="0" rtlCol="0" anchor="b"/>
-          <a:lstStyle/>
-          <a:p>
-            <a:pPr indent="0" marL="0">
-              <a:buNone/>
-            </a:pPr>
-            <a:r>
-              <a:rPr lang="en-US" sz="1000" dirty="0">
-                <a:solidFill>
-                  <a:srgbClr val="64748B"/>
-                </a:solidFill>
-                <a:latin typeface="Arial Black" pitchFamily="34" charset="0"/>
-                <a:ea typeface="Arial Black" pitchFamily="34" charset="-122"/>
-                <a:cs typeface="Arial Black" pitchFamily="34" charset="-120"/>
-              </a:rPr>
-              <a:t>Level 1</a:t>
-            </a:r>
-            <a:endParaRPr lang="en-US" sz="1000" dirty="0"/>
-          </a:p>
-        </p:txBody>
-      </p:sp>
-      <p:sp>
-        <p:nvSpPr>
-          <p:cNvPr id="7" name="Text 5"/>
-          <p:cNvSpPr/>
-          <p:nvPr/>
-        </p:nvSpPr>
-        <p:spPr>
-          <a:xfrm>
-            <a:off x="1737360" y="3300984"/>
-            <a:ext cx="2743200" cy="434340"/>
-          </a:xfrm>
-          <a:prstGeom prst="rect">
-            <a:avLst/>
-          </a:prstGeom>
-          <a:noFill/>
-          <a:ln/>
-        </p:spPr>
-        <p:txBody>
-          <a:bodyPr wrap="square" lIns="0" tIns="0" rIns="0" bIns="0" rtlCol="0" anchor="b"/>
-          <a:lstStyle/>
-          <a:p>
-            <a:pPr indent="0" marL="0">
-              <a:buNone/>
-            </a:pPr>
-            <a:r>
-              <a:rPr lang="en-US" sz="1400" b="1" dirty="0">
-                <a:solidFill>
-                  <a:srgbClr val="64748B"/>
-                </a:solidFill>
-                <a:latin typeface="Arial Black" pitchFamily="34" charset="0"/>
-                <a:ea typeface="Arial Black" pitchFamily="34" charset="-122"/>
-                <a:cs typeface="Arial Black" pitchFamily="34" charset="-120"/>
-              </a:rPr>
-              <a:t>バイブコーディング</a:t>
-            </a:r>
-            <a:endParaRPr lang="en-US" sz="1400" dirty="0"/>
-          </a:p>
-        </p:txBody>
-      </p:sp>
-      <p:sp>
-        <p:nvSpPr>
-          <p:cNvPr id="8" name="Text 6"/>
-          <p:cNvSpPr/>
-          <p:nvPr/>
-        </p:nvSpPr>
-        <p:spPr>
-          <a:xfrm>
-            <a:off x="640080" y="3735324"/>
-            <a:ext cx="3703320" cy="434340"/>
-          </a:xfrm>
-          <a:prstGeom prst="rect">
-            <a:avLst/>
-          </a:prstGeom>
-          <a:noFill/>
-          <a:ln/>
-        </p:spPr>
-        <p:txBody>
-          <a:bodyPr wrap="square" lIns="0" tIns="0" rIns="0" bIns="0" rtlCol="0" anchor="t"/>
-          <a:lstStyle/>
-          <a:p>
-            <a:pPr indent="0" marL="0">
-              <a:buNone/>
-            </a:pPr>
-            <a:r>
-              <a:rPr lang="en-US" sz="900" dirty="0">
-                <a:solidFill>
-                  <a:srgbClr val="2D3748"/>
-                </a:solidFill>
-                <a:latin typeface="Meiryo" pitchFamily="34" charset="0"/>
-                <a:ea typeface="Meiryo" pitchFamily="34" charset="-122"/>
-                <a:cs typeface="Meiryo" pitchFamily="34" charset="-120"/>
-              </a:rPr>
-              <a:t>自然言語で指示 → AI即座にコード生成</a:t>
-            </a:r>
-            <a:endParaRPr lang="en-US" sz="900" dirty="0"/>
-          </a:p>
-          <a:p>
-            <a:pPr indent="0" marL="0">
-              <a:buNone/>
-            </a:pPr>
-            <a:r>
-              <a:rPr lang="en-US" sz="900" dirty="0">
-                <a:solidFill>
-                  <a:srgbClr val="2D3748"/>
-                </a:solidFill>
-                <a:latin typeface="Meiryo" pitchFamily="34" charset="0"/>
-                <a:ea typeface="Meiryo" pitchFamily="34" charset="-122"/>
-                <a:cs typeface="Meiryo" pitchFamily="34" charset="-120"/>
-              </a:rPr>
-              <a:t>プロトタイプ・個人ツール向き</a:t>
-            </a:r>
-            <a:endParaRPr lang="en-US" sz="900" dirty="0"/>
-          </a:p>
-        </p:txBody>
-      </p:sp>
-      <p:sp>
-        <p:nvSpPr>
-          <p:cNvPr id="9" name="Text 7"/>
-          <p:cNvSpPr/>
-          <p:nvPr/>
-        </p:nvSpPr>
-        <p:spPr>
-          <a:xfrm>
-            <a:off x="4343400" y="3735324"/>
-            <a:ext cx="4114800" cy="434340"/>
-          </a:xfrm>
-          <a:prstGeom prst="rect">
-            <a:avLst/>
-          </a:prstGeom>
-          <a:noFill/>
-          <a:ln/>
-        </p:spPr>
-        <p:txBody>
-          <a:bodyPr wrap="square" lIns="0" tIns="0" rIns="0" bIns="0" rtlCol="0" anchor="t"/>
-          <a:lstStyle/>
-          <a:p>
-            <a:pPr indent="0" marL="0">
-              <a:buNone/>
-            </a:pPr>
-            <a:r>
-              <a:rPr lang="en-US" sz="900" dirty="0">
-                <a:solidFill>
-                  <a:srgbClr val="64748B"/>
-                </a:solidFill>
-                <a:latin typeface="Meiryo" pitchFamily="34" charset="0"/>
-                <a:ea typeface="Meiryo" pitchFamily="34" charset="-122"/>
-                <a:cs typeface="Meiryo" pitchFamily="34" charset="-120"/>
-              </a:rPr>
-              <a:t>仕様曖昧で手戻り / スケールしない / 記録が残らない</a:t>
-            </a:r>
-            <a:endParaRPr lang="en-US" sz="900" dirty="0"/>
-          </a:p>
-        </p:txBody>
-      </p:sp>
-      <p:sp>
-        <p:nvSpPr>
-          <p:cNvPr id="10" name="Shape 8"/>
-          <p:cNvSpPr/>
-          <p:nvPr/>
-        </p:nvSpPr>
-        <p:spPr>
-          <a:xfrm>
-            <a:off x="457200" y="2359152"/>
-            <a:ext cx="6400800" cy="868680"/>
-          </a:xfrm>
-          <a:prstGeom prst="rect">
-            <a:avLst/>
-          </a:prstGeom>
-          <a:solidFill>
-            <a:srgbClr val="1E2761"/>
-          </a:solidFill>
-          <a:ln w="12700">
-            <a:solidFill>
-              <a:srgbClr val="1E2761"/>
-            </a:solidFill>
-            <a:prstDash val="solid"/>
-          </a:ln>
-        </p:spPr>
-      </p:sp>
-      <p:sp>
-        <p:nvSpPr>
-          <p:cNvPr id="11" name="Text 9"/>
-          <p:cNvSpPr/>
-          <p:nvPr/>
-        </p:nvSpPr>
-        <p:spPr>
-          <a:xfrm>
-            <a:off x="640080" y="2359152"/>
-            <a:ext cx="1097280" cy="434340"/>
-          </a:xfrm>
-          <a:prstGeom prst="rect">
-            <a:avLst/>
-          </a:prstGeom>
-          <a:noFill/>
-          <a:ln/>
-        </p:spPr>
-        <p:txBody>
-          <a:bodyPr wrap="square" lIns="0" tIns="0" rIns="0" bIns="0" rtlCol="0" anchor="b"/>
-          <a:lstStyle/>
-          <a:p>
-            <a:pPr indent="0" marL="0">
-              <a:buNone/>
-            </a:pPr>
-            <a:r>
-              <a:rPr lang="en-US" sz="1000" dirty="0">
-                <a:solidFill>
-                  <a:srgbClr val="FFFFFF"/>
-                </a:solidFill>
-                <a:latin typeface="Arial Black" pitchFamily="34" charset="0"/>
-                <a:ea typeface="Arial Black" pitchFamily="34" charset="-122"/>
-                <a:cs typeface="Arial Black" pitchFamily="34" charset="-120"/>
-              </a:rPr>
-              <a:t>Level 2</a:t>
-            </a:r>
-            <a:endParaRPr lang="en-US" sz="1000" dirty="0"/>
-          </a:p>
-        </p:txBody>
-      </p:sp>
-      <p:sp>
-        <p:nvSpPr>
-          <p:cNvPr id="12" name="Text 10"/>
-          <p:cNvSpPr/>
-          <p:nvPr/>
-        </p:nvSpPr>
-        <p:spPr>
-          <a:xfrm>
-            <a:off x="1737360" y="2359152"/>
-            <a:ext cx="2743200" cy="434340"/>
-          </a:xfrm>
-          <a:prstGeom prst="rect">
-            <a:avLst/>
-          </a:prstGeom>
-          <a:noFill/>
-          <a:ln/>
-        </p:spPr>
-        <p:txBody>
-          <a:bodyPr wrap="square" lIns="0" tIns="0" rIns="0" bIns="0" rtlCol="0" anchor="b"/>
-          <a:lstStyle/>
-          <a:p>
-            <a:pPr indent="0" marL="0">
-              <a:buNone/>
-            </a:pPr>
-            <a:r>
-              <a:rPr lang="en-US" sz="1400" b="1" dirty="0">
-                <a:solidFill>
-                  <a:srgbClr val="FFFFFF"/>
-                </a:solidFill>
-                <a:latin typeface="Arial Black" pitchFamily="34" charset="0"/>
-                <a:ea typeface="Arial Black" pitchFamily="34" charset="-122"/>
-                <a:cs typeface="Arial Black" pitchFamily="34" charset="-120"/>
-              </a:rPr>
-              <a:t>スペック駆動開発（SDD）</a:t>
-            </a:r>
-            <a:endParaRPr lang="en-US" sz="1400" dirty="0"/>
-          </a:p>
-        </p:txBody>
-      </p:sp>
-      <p:sp>
-        <p:nvSpPr>
-          <p:cNvPr id="13" name="Text 11"/>
-          <p:cNvSpPr/>
-          <p:nvPr/>
-        </p:nvSpPr>
-        <p:spPr>
-          <a:xfrm>
-            <a:off x="640080" y="2793492"/>
-            <a:ext cx="2880360" cy="434340"/>
-          </a:xfrm>
-          <a:prstGeom prst="rect">
-            <a:avLst/>
-          </a:prstGeom>
-          <a:noFill/>
-          <a:ln/>
-        </p:spPr>
-        <p:txBody>
-          <a:bodyPr wrap="square" lIns="0" tIns="0" rIns="0" bIns="0" rtlCol="0" anchor="t"/>
-          <a:lstStyle/>
-          <a:p>
-            <a:pPr indent="0" marL="0">
-              <a:buNone/>
-            </a:pPr>
-            <a:r>
-              <a:rPr lang="en-US" sz="900" dirty="0">
-                <a:solidFill>
-                  <a:srgbClr val="CADCFC"/>
-                </a:solidFill>
-                <a:latin typeface="Meiryo" pitchFamily="34" charset="0"/>
-                <a:ea typeface="Meiryo" pitchFamily="34" charset="-122"/>
-                <a:cs typeface="Meiryo" pitchFamily="34" charset="-120"/>
-              </a:rPr>
-              <a:t>仕様書をSingle Source of Truth</a:t>
-            </a:r>
-            <a:endParaRPr lang="en-US" sz="900" dirty="0"/>
-          </a:p>
-          <a:p>
-            <a:pPr indent="0" marL="0">
-              <a:buNone/>
-            </a:pPr>
-            <a:r>
-              <a:rPr lang="en-US" sz="900" dirty="0">
-                <a:solidFill>
-                  <a:srgbClr val="CADCFC"/>
-                </a:solidFill>
-                <a:latin typeface="Meiryo" pitchFamily="34" charset="0"/>
-                <a:ea typeface="Meiryo" pitchFamily="34" charset="-122"/>
-                <a:cs typeface="Meiryo" pitchFamily="34" charset="-120"/>
-              </a:rPr>
-              <a:t>PRD→設計書→仕様書→実装</a:t>
-            </a:r>
-            <a:endParaRPr lang="en-US" sz="900" dirty="0"/>
-          </a:p>
-        </p:txBody>
-      </p:sp>
-      <p:sp>
-        <p:nvSpPr>
-          <p:cNvPr id="14" name="Text 12"/>
-          <p:cNvSpPr/>
-          <p:nvPr/>
-        </p:nvSpPr>
-        <p:spPr>
-          <a:xfrm>
-            <a:off x="3520440" y="2793492"/>
-            <a:ext cx="3200400" cy="434340"/>
-          </a:xfrm>
-          <a:prstGeom prst="rect">
-            <a:avLst/>
-          </a:prstGeom>
-          <a:noFill/>
-          <a:ln/>
-        </p:spPr>
-        <p:txBody>
-          <a:bodyPr wrap="square" lIns="0" tIns="0" rIns="0" bIns="0" rtlCol="0" anchor="t"/>
-          <a:lstStyle/>
-          <a:p>
-            <a:pPr indent="0" marL="0">
-              <a:buNone/>
-            </a:pPr>
-            <a:r>
-              <a:rPr lang="en-US" sz="900" dirty="0">
-                <a:solidFill>
-                  <a:srgbClr val="CADCFC"/>
-                </a:solidFill>
-                <a:latin typeface="Meiryo" pitchFamily="34" charset="0"/>
-                <a:ea typeface="Meiryo" pitchFamily="34" charset="-122"/>
-                <a:cs typeface="Meiryo" pitchFamily="34" charset="-120"/>
-              </a:rPr>
-              <a:t>チーム開発・プロダクション品質に対応可能</a:t>
-            </a:r>
-            <a:endParaRPr lang="en-US" sz="900" dirty="0"/>
-          </a:p>
-        </p:txBody>
-      </p:sp>
-      <p:sp>
-        <p:nvSpPr>
-          <p:cNvPr id="15" name="Shape 13"/>
-          <p:cNvSpPr/>
-          <p:nvPr/>
-        </p:nvSpPr>
-        <p:spPr>
-          <a:xfrm>
-            <a:off x="457200" y="1417320"/>
-            <a:ext cx="4572000" cy="868680"/>
-          </a:xfrm>
-          <a:prstGeom prst="rect">
-            <a:avLst/>
-          </a:prstGeom>
-          <a:solidFill>
-            <a:srgbClr val="F96167"/>
-          </a:solidFill>
-          <a:ln w="12700">
-            <a:solidFill>
-              <a:srgbClr val="F96167"/>
-            </a:solidFill>
-            <a:prstDash val="solid"/>
-          </a:ln>
-        </p:spPr>
-      </p:sp>
-      <p:sp>
-        <p:nvSpPr>
-          <p:cNvPr id="16" name="Text 14"/>
-          <p:cNvSpPr/>
-          <p:nvPr/>
-        </p:nvSpPr>
-        <p:spPr>
-          <a:xfrm>
-            <a:off x="640080" y="1417320"/>
-            <a:ext cx="1097280" cy="434340"/>
-          </a:xfrm>
-          <a:prstGeom prst="rect">
-            <a:avLst/>
-          </a:prstGeom>
-          <a:noFill/>
-          <a:ln/>
-        </p:spPr>
-        <p:txBody>
-          <a:bodyPr wrap="square" lIns="0" tIns="0" rIns="0" bIns="0" rtlCol="0" anchor="b"/>
-          <a:lstStyle/>
-          <a:p>
-            <a:pPr indent="0" marL="0">
-              <a:buNone/>
-            </a:pPr>
-            <a:r>
-              <a:rPr lang="en-US" sz="1000" dirty="0">
-                <a:solidFill>
-                  <a:srgbClr val="FFFFFF"/>
-                </a:solidFill>
-                <a:latin typeface="Arial Black" pitchFamily="34" charset="0"/>
-                <a:ea typeface="Arial Black" pitchFamily="34" charset="-122"/>
-                <a:cs typeface="Arial Black" pitchFamily="34" charset="-120"/>
-              </a:rPr>
-              <a:t>Level 3</a:t>
-            </a:r>
-            <a:endParaRPr lang="en-US" sz="1000" dirty="0"/>
-          </a:p>
-        </p:txBody>
-      </p:sp>
-      <p:sp>
-        <p:nvSpPr>
-          <p:cNvPr id="17" name="Text 15"/>
-          <p:cNvSpPr/>
-          <p:nvPr/>
-        </p:nvSpPr>
-        <p:spPr>
-          <a:xfrm>
-            <a:off x="1737360" y="1417320"/>
-            <a:ext cx="2743200" cy="434340"/>
-          </a:xfrm>
-          <a:prstGeom prst="rect">
-            <a:avLst/>
-          </a:prstGeom>
-          <a:noFill/>
-          <a:ln/>
-        </p:spPr>
-        <p:txBody>
-          <a:bodyPr wrap="square" lIns="0" tIns="0" rIns="0" bIns="0" rtlCol="0" anchor="b"/>
-          <a:lstStyle/>
-          <a:p>
-            <a:pPr indent="0" marL="0">
-              <a:buNone/>
-            </a:pPr>
-            <a:r>
-              <a:rPr lang="en-US" sz="1400" b="1" dirty="0">
-                <a:solidFill>
-                  <a:srgbClr val="FFFFFF"/>
-                </a:solidFill>
-                <a:latin typeface="Arial Black" pitchFamily="34" charset="0"/>
-                <a:ea typeface="Arial Black" pitchFamily="34" charset="-122"/>
-                <a:cs typeface="Arial Black" pitchFamily="34" charset="-120"/>
-              </a:rPr>
-              <a:t>AIDLC</a:t>
-            </a:r>
-            <a:endParaRPr lang="en-US" sz="1400" dirty="0"/>
-          </a:p>
-        </p:txBody>
-      </p:sp>
-      <p:sp>
-        <p:nvSpPr>
-          <p:cNvPr id="18" name="Text 16"/>
-          <p:cNvSpPr/>
-          <p:nvPr/>
-        </p:nvSpPr>
-        <p:spPr>
-          <a:xfrm>
-            <a:off x="640080" y="1851660"/>
-            <a:ext cx="2057400" cy="434340"/>
-          </a:xfrm>
-          <a:prstGeom prst="rect">
-            <a:avLst/>
-          </a:prstGeom>
-          <a:noFill/>
-          <a:ln/>
-        </p:spPr>
-        <p:txBody>
-          <a:bodyPr wrap="square" lIns="0" tIns="0" rIns="0" bIns="0" rtlCol="0" anchor="t"/>
-          <a:lstStyle/>
-          <a:p>
-            <a:pPr indent="0" marL="0">
-              <a:buNone/>
-            </a:pPr>
-            <a:r>
-              <a:rPr lang="en-US" sz="900" dirty="0">
-                <a:solidFill>
-                  <a:srgbClr val="CADCFC"/>
-                </a:solidFill>
-                <a:latin typeface="Meiryo" pitchFamily="34" charset="0"/>
-                <a:ea typeface="Meiryo" pitchFamily="34" charset="-122"/>
-                <a:cs typeface="Meiryo" pitchFamily="34" charset="-120"/>
-              </a:rPr>
-              <a:t>Inception→Construction→Operation</a:t>
-            </a:r>
-            <a:endParaRPr lang="en-US" sz="900" dirty="0"/>
-          </a:p>
-          <a:p>
-            <a:pPr indent="0" marL="0">
-              <a:buNone/>
-            </a:pPr>
-            <a:r>
-              <a:rPr lang="en-US" sz="900" dirty="0">
-                <a:solidFill>
-                  <a:srgbClr val="CADCFC"/>
-                </a:solidFill>
-                <a:latin typeface="Meiryo" pitchFamily="34" charset="0"/>
-                <a:ea typeface="Meiryo" pitchFamily="34" charset="-122"/>
-                <a:cs typeface="Meiryo" pitchFamily="34" charset="-120"/>
-              </a:rPr>
-              <a:t>各フェーズに人間のレビューゲート</a:t>
-            </a:r>
-            <a:endParaRPr lang="en-US" sz="900" dirty="0"/>
-          </a:p>
-        </p:txBody>
-      </p:sp>
-      <p:sp>
-        <p:nvSpPr>
-          <p:cNvPr id="19" name="Text 17"/>
-          <p:cNvSpPr/>
-          <p:nvPr/>
-        </p:nvSpPr>
-        <p:spPr>
-          <a:xfrm>
-            <a:off x="2697480" y="1851660"/>
-            <a:ext cx="2286000" cy="434340"/>
-          </a:xfrm>
-          <a:prstGeom prst="rect">
-            <a:avLst/>
-          </a:prstGeom>
-          <a:noFill/>
-          <a:ln/>
-        </p:spPr>
-        <p:txBody>
-          <a:bodyPr wrap="square" lIns="0" tIns="0" rIns="0" bIns="0" rtlCol="0" anchor="t"/>
-          <a:lstStyle/>
-          <a:p>
-            <a:pPr indent="0" marL="0">
-              <a:buNone/>
-            </a:pPr>
-            <a:r>
-              <a:rPr lang="en-US" sz="900" dirty="0">
-                <a:solidFill>
-                  <a:srgbClr val="CADCFC"/>
-                </a:solidFill>
-                <a:latin typeface="Meiryo" pitchFamily="34" charset="0"/>
-                <a:ea typeface="Meiryo" pitchFamily="34" charset="-122"/>
-                <a:cs typeface="Meiryo" pitchFamily="34" charset="-120"/>
-              </a:rPr>
-              <a:t>大規模チーム・組織レベルのAI開発ガバナンス</a:t>
-            </a:r>
-            <a:endParaRPr lang="en-US" sz="900" dirty="0"/>
-          </a:p>
-        </p:txBody>
-      </p:sp>
-      <p:sp>
-        <p:nvSpPr>
-          <p:cNvPr id="20" name="Shape 18"/>
-          <p:cNvSpPr/>
-          <p:nvPr/>
-        </p:nvSpPr>
-        <p:spPr>
-          <a:xfrm>
-            <a:off x="457200" y="4343400"/>
-            <a:ext cx="8229600" cy="365760"/>
-          </a:xfrm>
-          <a:prstGeom prst="rect">
-            <a:avLst/>
-          </a:prstGeom>
-          <a:solidFill>
-            <a:srgbClr val="151B47"/>
-          </a:solidFill>
-          <a:ln w="12700">
-            <a:solidFill>
-              <a:srgbClr val="151B47"/>
-            </a:solidFill>
-            <a:prstDash val="solid"/>
-          </a:ln>
-        </p:spPr>
-      </p:sp>
-      <p:sp>
-        <p:nvSpPr>
-          <p:cNvPr id="21" name="Text 19"/>
-          <p:cNvSpPr/>
-          <p:nvPr/>
-        </p:nvSpPr>
-        <p:spPr>
-          <a:xfrm>
-            <a:off x="594360" y="4343400"/>
-            <a:ext cx="7955280" cy="365760"/>
-          </a:xfrm>
-          <a:prstGeom prst="rect">
-            <a:avLst/>
-          </a:prstGeom>
-          <a:noFill/>
-          <a:ln/>
-        </p:spPr>
-        <p:txBody>
-          <a:bodyPr wrap="square" lIns="0" tIns="0" rIns="0" bIns="0" rtlCol="0" anchor="ctr"/>
-          <a:lstStyle/>
-          <a:p>
-            <a:pPr indent="0" marL="0">
-              <a:buNone/>
-            </a:pPr>
-            <a:r>
-              <a:rPr lang="en-US" sz="1200" dirty="0">
-                <a:solidFill>
-                  <a:srgbClr val="FFFFFF"/>
-                </a:solidFill>
-                <a:latin typeface="Meiryo" pitchFamily="34" charset="0"/>
-                <a:ea typeface="Meiryo" pitchFamily="34" charset="-122"/>
-                <a:cs typeface="Meiryo" pitchFamily="34" charset="-120"/>
-              </a:rPr>
-              <a:t>💡 </a:t>
-            </a:r>
-            <a:pPr indent="0" marL="0">
-              <a:buNone/>
-            </a:pPr>
-            <a:r>
-              <a:rPr lang="en-US" sz="1100" dirty="0">
-                <a:solidFill>
-                  <a:srgbClr val="CADCFC"/>
-                </a:solidFill>
-                <a:latin typeface="Meiryo" pitchFamily="34" charset="0"/>
-                <a:ea typeface="Meiryo" pitchFamily="34" charset="-122"/>
-                <a:cs typeface="Meiryo" pitchFamily="34" charset="-120"/>
-              </a:rPr>
-              <a:t>バイブコーディングが悪いのではない。</a:t>
-            </a:r>
-            <a:pPr indent="0" marL="0">
-              <a:buNone/>
-            </a:pPr>
-            <a:r>
-              <a:rPr lang="en-US" sz="1100" b="1" dirty="0">
-                <a:solidFill>
-                  <a:srgbClr val="FFFFFF"/>
-                </a:solidFill>
-                <a:latin typeface="Meiryo" pitchFamily="34" charset="0"/>
-                <a:ea typeface="Meiryo" pitchFamily="34" charset="-122"/>
-                <a:cs typeface="Meiryo" pitchFamily="34" charset="-120"/>
-              </a:rPr>
-              <a:t> プロトタイプには最適。だが業務コードには「型」が要る</a:t>
-            </a:r>
-            <a:endParaRPr lang="en-US" sz="1100" dirty="0"/>
-          </a:p>
-        </p:txBody>
-      </p:sp>
-      <p:sp>
-        <p:nvSpPr>
-          <p:cNvPr id="22" name="Text 20"/>
           <p:cNvSpPr/>
           <p:nvPr/>
         </p:nvSpPr>
